--- a/Getting Started with Python for Data Analytics.pptx
+++ b/Getting Started with Python for Data Analytics.pptx
@@ -141,7 +141,7 @@
   <pc:docChgLst>
     <pc:chgData name="Kortis, Adam" userId="0598b173-926b-455a-a07c-3afc69446909" providerId="ADAL" clId="{2705B347-3F5C-4794-B861-E067CD88D9DB}"/>
     <pc:docChg chg="undo custSel addSld delSld modSld">
-      <pc:chgData name="Kortis, Adam" userId="0598b173-926b-455a-a07c-3afc69446909" providerId="ADAL" clId="{2705B347-3F5C-4794-B861-E067CD88D9DB}" dt="2026-04-06T16:47:33.748" v="8061" actId="20577"/>
+      <pc:chgData name="Kortis, Adam" userId="0598b173-926b-455a-a07c-3afc69446909" providerId="ADAL" clId="{2705B347-3F5C-4794-B861-E067CD88D9DB}" dt="2026-04-06T18:53:02.051" v="8078" actId="20577"/>
       <pc:docMkLst>
         <pc:docMk/>
       </pc:docMkLst>
@@ -471,7 +471,7 @@
         </pc:spChg>
       </pc:sldChg>
       <pc:sldChg chg="modSp new mod">
-        <pc:chgData name="Kortis, Adam" userId="0598b173-926b-455a-a07c-3afc69446909" providerId="ADAL" clId="{2705B347-3F5C-4794-B861-E067CD88D9DB}" dt="2026-04-06T16:47:33.748" v="8061" actId="20577"/>
+        <pc:chgData name="Kortis, Adam" userId="0598b173-926b-455a-a07c-3afc69446909" providerId="ADAL" clId="{2705B347-3F5C-4794-B861-E067CD88D9DB}" dt="2026-04-06T18:53:02.051" v="8078" actId="20577"/>
         <pc:sldMkLst>
           <pc:docMk/>
           <pc:sldMk cId="1314709943" sldId="268"/>
@@ -485,7 +485,7 @@
           </ac:spMkLst>
         </pc:spChg>
         <pc:spChg chg="mod">
-          <ac:chgData name="Kortis, Adam" userId="0598b173-926b-455a-a07c-3afc69446909" providerId="ADAL" clId="{2705B347-3F5C-4794-B861-E067CD88D9DB}" dt="2026-04-06T16:47:33.748" v="8061" actId="20577"/>
+          <ac:chgData name="Kortis, Adam" userId="0598b173-926b-455a-a07c-3afc69446909" providerId="ADAL" clId="{2705B347-3F5C-4794-B861-E067CD88D9DB}" dt="2026-04-06T18:53:02.051" v="8078" actId="20577"/>
           <ac:spMkLst>
             <pc:docMk/>
             <pc:sldMk cId="1314709943" sldId="268"/>
@@ -5215,16 +5215,22 @@
           </a:p>
           <a:p>
             <a:r>
+              <a:rPr lang="en-US" dirty="0"/>
+              <a:t>Power BI use </a:t>
+            </a:r>
+          </a:p>
+          <a:p>
+            <a:r>
+              <a:rPr lang="en-US" dirty="0"/>
+              <a:t>Questions?</a:t>
+            </a:r>
+          </a:p>
+          <a:p>
+            <a:r>
               <a:rPr lang="en-US"/>
-              <a:t>Power BI use </a:t>
+              <a:t>Marimo</a:t>
             </a:r>
             <a:endParaRPr lang="en-US" dirty="0"/>
-          </a:p>
-          <a:p>
-            <a:r>
-              <a:rPr lang="en-US" dirty="0"/>
-              <a:t>Questions?</a:t>
-            </a:r>
           </a:p>
         </p:txBody>
       </p:sp>

--- a/Getting Started with Python for Data Analytics.pptx
+++ b/Getting Started with Python for Data Analytics.pptx
@@ -128,20 +128,12 @@
 </p:presentation>
 </file>
 
-<file path=ppt/revisionInfo.xml><?xml version="1.0" encoding="utf-8"?>
-<p1510:revInfo xmlns:a="http://schemas.openxmlformats.org/drawingml/2006/main" xmlns:r="http://schemas.openxmlformats.org/officeDocument/2006/relationships" xmlns:p1510="http://schemas.microsoft.com/office/powerpoint/2015/10/main">
-  <p1510:revLst>
-    <p1510:client id="{EC6BE08D-F12C-446D-BA2C-EB85838FE8C6}" v="1" dt="2026-04-06T14:28:58.851"/>
-  </p1510:revLst>
-</p1510:revInfo>
-</file>
-
 <file path=ppt/changesInfos/changesInfo1.xml><?xml version="1.0" encoding="utf-8"?>
 <pc:chgInfo xmlns:a="http://schemas.openxmlformats.org/drawingml/2006/main" xmlns:r="http://schemas.openxmlformats.org/officeDocument/2006/relationships" xmlns:ac="http://schemas.microsoft.com/office/drawing/2013/main/command" xmlns:pc="http://schemas.microsoft.com/office/powerpoint/2013/main/command">
   <pc:docChgLst>
     <pc:chgData name="Kortis, Adam" userId="0598b173-926b-455a-a07c-3afc69446909" providerId="ADAL" clId="{2705B347-3F5C-4794-B861-E067CD88D9DB}"/>
     <pc:docChg chg="undo custSel addSld delSld modSld">
-      <pc:chgData name="Kortis, Adam" userId="0598b173-926b-455a-a07c-3afc69446909" providerId="ADAL" clId="{2705B347-3F5C-4794-B861-E067CD88D9DB}" dt="2026-04-06T18:53:02.051" v="8078" actId="20577"/>
+      <pc:chgData name="Kortis, Adam" userId="0598b173-926b-455a-a07c-3afc69446909" providerId="ADAL" clId="{2705B347-3F5C-4794-B861-E067CD88D9DB}" dt="2026-04-08T14:28:55.693" v="8362" actId="20577"/>
       <pc:docMkLst>
         <pc:docMk/>
       </pc:docMkLst>
@@ -192,7 +184,7 @@
         </pc:spChg>
       </pc:sldChg>
       <pc:sldChg chg="modSp new mod">
-        <pc:chgData name="Kortis, Adam" userId="0598b173-926b-455a-a07c-3afc69446909" providerId="ADAL" clId="{2705B347-3F5C-4794-B861-E067CD88D9DB}" dt="2026-04-06T14:46:04.050" v="7758" actId="20577"/>
+        <pc:chgData name="Kortis, Adam" userId="0598b173-926b-455a-a07c-3afc69446909" providerId="ADAL" clId="{2705B347-3F5C-4794-B861-E067CD88D9DB}" dt="2026-04-07T13:22:02.726" v="8149" actId="27636"/>
         <pc:sldMkLst>
           <pc:docMk/>
           <pc:sldMk cId="910298586" sldId="258"/>
@@ -206,7 +198,7 @@
           </ac:spMkLst>
         </pc:spChg>
         <pc:spChg chg="mod">
-          <ac:chgData name="Kortis, Adam" userId="0598b173-926b-455a-a07c-3afc69446909" providerId="ADAL" clId="{2705B347-3F5C-4794-B861-E067CD88D9DB}" dt="2026-04-06T14:46:04.050" v="7758" actId="20577"/>
+          <ac:chgData name="Kortis, Adam" userId="0598b173-926b-455a-a07c-3afc69446909" providerId="ADAL" clId="{2705B347-3F5C-4794-B861-E067CD88D9DB}" dt="2026-04-07T13:22:02.726" v="8149" actId="27636"/>
           <ac:spMkLst>
             <pc:docMk/>
             <pc:sldMk cId="910298586" sldId="258"/>
@@ -215,7 +207,7 @@
         </pc:spChg>
       </pc:sldChg>
       <pc:sldChg chg="modSp new mod">
-        <pc:chgData name="Kortis, Adam" userId="0598b173-926b-455a-a07c-3afc69446909" providerId="ADAL" clId="{2705B347-3F5C-4794-B861-E067CD88D9DB}" dt="2026-04-06T14:49:54.366" v="7914" actId="20577"/>
+        <pc:chgData name="Kortis, Adam" userId="0598b173-926b-455a-a07c-3afc69446909" providerId="ADAL" clId="{2705B347-3F5C-4794-B861-E067CD88D9DB}" dt="2026-04-08T14:28:55.693" v="8362" actId="20577"/>
         <pc:sldMkLst>
           <pc:docMk/>
           <pc:sldMk cId="2575487833" sldId="259"/>
@@ -229,7 +221,7 @@
           </ac:spMkLst>
         </pc:spChg>
         <pc:spChg chg="mod">
-          <ac:chgData name="Kortis, Adam" userId="0598b173-926b-455a-a07c-3afc69446909" providerId="ADAL" clId="{2705B347-3F5C-4794-B861-E067CD88D9DB}" dt="2026-04-02T17:10:24.779" v="2220" actId="20577"/>
+          <ac:chgData name="Kortis, Adam" userId="0598b173-926b-455a-a07c-3afc69446909" providerId="ADAL" clId="{2705B347-3F5C-4794-B861-E067CD88D9DB}" dt="2026-04-07T13:22:19.065" v="8150" actId="20577"/>
           <ac:spMkLst>
             <pc:docMk/>
             <pc:sldMk cId="2575487833" sldId="259"/>
@@ -237,7 +229,7 @@
           </ac:spMkLst>
         </pc:spChg>
         <pc:spChg chg="mod">
-          <ac:chgData name="Kortis, Adam" userId="0598b173-926b-455a-a07c-3afc69446909" providerId="ADAL" clId="{2705B347-3F5C-4794-B861-E067CD88D9DB}" dt="2026-04-06T14:47:38.560" v="7860" actId="20577"/>
+          <ac:chgData name="Kortis, Adam" userId="0598b173-926b-455a-a07c-3afc69446909" providerId="ADAL" clId="{2705B347-3F5C-4794-B861-E067CD88D9DB}" dt="2026-04-08T14:28:55.693" v="8362" actId="20577"/>
           <ac:spMkLst>
             <pc:docMk/>
             <pc:sldMk cId="2575487833" sldId="259"/>
@@ -253,7 +245,7 @@
           </ac:spMkLst>
         </pc:spChg>
         <pc:spChg chg="mod">
-          <ac:chgData name="Kortis, Adam" userId="0598b173-926b-455a-a07c-3afc69446909" providerId="ADAL" clId="{2705B347-3F5C-4794-B861-E067CD88D9DB}" dt="2026-04-06T14:49:54.366" v="7914" actId="20577"/>
+          <ac:chgData name="Kortis, Adam" userId="0598b173-926b-455a-a07c-3afc69446909" providerId="ADAL" clId="{2705B347-3F5C-4794-B861-E067CD88D9DB}" dt="2026-04-08T14:28:49.238" v="8339" actId="27636"/>
           <ac:spMkLst>
             <pc:docMk/>
             <pc:sldMk cId="2575487833" sldId="259"/>
@@ -262,7 +254,7 @@
         </pc:spChg>
       </pc:sldChg>
       <pc:sldChg chg="modSp new mod modNotesTx">
-        <pc:chgData name="Kortis, Adam" userId="0598b173-926b-455a-a07c-3afc69446909" providerId="ADAL" clId="{2705B347-3F5C-4794-B861-E067CD88D9DB}" dt="2026-04-02T18:18:04.068" v="3628" actId="20577"/>
+        <pc:chgData name="Kortis, Adam" userId="0598b173-926b-455a-a07c-3afc69446909" providerId="ADAL" clId="{2705B347-3F5C-4794-B861-E067CD88D9DB}" dt="2026-04-08T14:18:51.294" v="8222" actId="20577"/>
         <pc:sldMkLst>
           <pc:docMk/>
           <pc:sldMk cId="2877614386" sldId="260"/>
@@ -276,7 +268,7 @@
           </ac:spMkLst>
         </pc:spChg>
         <pc:spChg chg="mod">
-          <ac:chgData name="Kortis, Adam" userId="0598b173-926b-455a-a07c-3afc69446909" providerId="ADAL" clId="{2705B347-3F5C-4794-B861-E067CD88D9DB}" dt="2026-04-02T18:18:04.068" v="3628" actId="20577"/>
+          <ac:chgData name="Kortis, Adam" userId="0598b173-926b-455a-a07c-3afc69446909" providerId="ADAL" clId="{2705B347-3F5C-4794-B861-E067CD88D9DB}" dt="2026-04-08T14:18:51.294" v="8222" actId="20577"/>
           <ac:spMkLst>
             <pc:docMk/>
             <pc:sldMk cId="2877614386" sldId="260"/>
@@ -355,7 +347,7 @@
         </pc:picChg>
       </pc:sldChg>
       <pc:sldChg chg="modSp new mod">
-        <pc:chgData name="Kortis, Adam" userId="0598b173-926b-455a-a07c-3afc69446909" providerId="ADAL" clId="{2705B347-3F5C-4794-B861-E067CD88D9DB}" dt="2026-04-02T18:35:29.062" v="4779" actId="20577"/>
+        <pc:chgData name="Kortis, Adam" userId="0598b173-926b-455a-a07c-3afc69446909" providerId="ADAL" clId="{2705B347-3F5C-4794-B861-E067CD88D9DB}" dt="2026-04-07T13:28:38.995" v="8198" actId="20577"/>
         <pc:sldMkLst>
           <pc:docMk/>
           <pc:sldMk cId="1383140307" sldId="263"/>
@@ -393,7 +385,7 @@
           </ac:spMkLst>
         </pc:spChg>
         <pc:spChg chg="mod">
-          <ac:chgData name="Kortis, Adam" userId="0598b173-926b-455a-a07c-3afc69446909" providerId="ADAL" clId="{2705B347-3F5C-4794-B861-E067CD88D9DB}" dt="2026-04-02T18:35:29.062" v="4779" actId="20577"/>
+          <ac:chgData name="Kortis, Adam" userId="0598b173-926b-455a-a07c-3afc69446909" providerId="ADAL" clId="{2705B347-3F5C-4794-B861-E067CD88D9DB}" dt="2026-04-07T13:28:38.995" v="8198" actId="20577"/>
           <ac:spMkLst>
             <pc:docMk/>
             <pc:sldMk cId="1383140307" sldId="263"/>
@@ -425,7 +417,7 @@
         </pc:spChg>
       </pc:sldChg>
       <pc:sldChg chg="modSp new mod">
-        <pc:chgData name="Kortis, Adam" userId="0598b173-926b-455a-a07c-3afc69446909" providerId="ADAL" clId="{2705B347-3F5C-4794-B861-E067CD88D9DB}" dt="2026-04-02T18:53:59.416" v="5880" actId="20577"/>
+        <pc:chgData name="Kortis, Adam" userId="0598b173-926b-455a-a07c-3afc69446909" providerId="ADAL" clId="{2705B347-3F5C-4794-B861-E067CD88D9DB}" dt="2026-04-08T14:23:36.370" v="8232" actId="20577"/>
         <pc:sldMkLst>
           <pc:docMk/>
           <pc:sldMk cId="1247533024" sldId="265"/>
@@ -439,7 +431,7 @@
           </ac:spMkLst>
         </pc:spChg>
         <pc:spChg chg="mod">
-          <ac:chgData name="Kortis, Adam" userId="0598b173-926b-455a-a07c-3afc69446909" providerId="ADAL" clId="{2705B347-3F5C-4794-B861-E067CD88D9DB}" dt="2026-04-02T18:53:59.416" v="5880" actId="20577"/>
+          <ac:chgData name="Kortis, Adam" userId="0598b173-926b-455a-a07c-3afc69446909" providerId="ADAL" clId="{2705B347-3F5C-4794-B861-E067CD88D9DB}" dt="2026-04-08T14:23:36.370" v="8232" actId="20577"/>
           <ac:spMkLst>
             <pc:docMk/>
             <pc:sldMk cId="1247533024" sldId="265"/>
@@ -448,7 +440,7 @@
         </pc:spChg>
       </pc:sldChg>
       <pc:sldChg chg="modSp new mod">
-        <pc:chgData name="Kortis, Adam" userId="0598b173-926b-455a-a07c-3afc69446909" providerId="ADAL" clId="{2705B347-3F5C-4794-B861-E067CD88D9DB}" dt="2026-04-06T14:52:46.508" v="8017" actId="20577"/>
+        <pc:chgData name="Kortis, Adam" userId="0598b173-926b-455a-a07c-3afc69446909" providerId="ADAL" clId="{2705B347-3F5C-4794-B861-E067CD88D9DB}" dt="2026-04-08T14:27:32.128" v="8336" actId="6549"/>
         <pc:sldMkLst>
           <pc:docMk/>
           <pc:sldMk cId="4162147224" sldId="266"/>
@@ -462,7 +454,7 @@
           </ac:spMkLst>
         </pc:spChg>
         <pc:spChg chg="mod">
-          <ac:chgData name="Kortis, Adam" userId="0598b173-926b-455a-a07c-3afc69446909" providerId="ADAL" clId="{2705B347-3F5C-4794-B861-E067CD88D9DB}" dt="2026-04-06T14:52:46.508" v="8017" actId="20577"/>
+          <ac:chgData name="Kortis, Adam" userId="0598b173-926b-455a-a07c-3afc69446909" providerId="ADAL" clId="{2705B347-3F5C-4794-B861-E067CD88D9DB}" dt="2026-04-08T14:27:32.128" v="8336" actId="6549"/>
           <ac:spMkLst>
             <pc:docMk/>
             <pc:sldMk cId="4162147224" sldId="266"/>
@@ -471,7 +463,7 @@
         </pc:spChg>
       </pc:sldChg>
       <pc:sldChg chg="modSp new mod">
-        <pc:chgData name="Kortis, Adam" userId="0598b173-926b-455a-a07c-3afc69446909" providerId="ADAL" clId="{2705B347-3F5C-4794-B861-E067CD88D9DB}" dt="2026-04-06T18:53:02.051" v="8078" actId="20577"/>
+        <pc:chgData name="Kortis, Adam" userId="0598b173-926b-455a-a07c-3afc69446909" providerId="ADAL" clId="{2705B347-3F5C-4794-B861-E067CD88D9DB}" dt="2026-04-07T13:31:16.036" v="8215" actId="20577"/>
         <pc:sldMkLst>
           <pc:docMk/>
           <pc:sldMk cId="1314709943" sldId="268"/>
@@ -485,7 +477,7 @@
           </ac:spMkLst>
         </pc:spChg>
         <pc:spChg chg="mod">
-          <ac:chgData name="Kortis, Adam" userId="0598b173-926b-455a-a07c-3afc69446909" providerId="ADAL" clId="{2705B347-3F5C-4794-B861-E067CD88D9DB}" dt="2026-04-06T18:53:02.051" v="8078" actId="20577"/>
+          <ac:chgData name="Kortis, Adam" userId="0598b173-926b-455a-a07c-3afc69446909" providerId="ADAL" clId="{2705B347-3F5C-4794-B861-E067CD88D9DB}" dt="2026-04-07T13:31:16.036" v="8215" actId="20577"/>
           <ac:spMkLst>
             <pc:docMk/>
             <pc:sldMk cId="1314709943" sldId="268"/>
@@ -517,7 +509,7 @@
         </pc:spChg>
       </pc:sldChg>
       <pc:sldChg chg="modSp new mod">
-        <pc:chgData name="Kortis, Adam" userId="0598b173-926b-455a-a07c-3afc69446909" providerId="ADAL" clId="{2705B347-3F5C-4794-B861-E067CD88D9DB}" dt="2026-04-06T14:51:55.378" v="7955" actId="20577"/>
+        <pc:chgData name="Kortis, Adam" userId="0598b173-926b-455a-a07c-3afc69446909" providerId="ADAL" clId="{2705B347-3F5C-4794-B861-E067CD88D9DB}" dt="2026-04-08T14:26:09.040" v="8248" actId="20577"/>
         <pc:sldMkLst>
           <pc:docMk/>
           <pc:sldMk cId="2491955574" sldId="270"/>
@@ -531,7 +523,7 @@
           </ac:spMkLst>
         </pc:spChg>
         <pc:spChg chg="mod">
-          <ac:chgData name="Kortis, Adam" userId="0598b173-926b-455a-a07c-3afc69446909" providerId="ADAL" clId="{2705B347-3F5C-4794-B861-E067CD88D9DB}" dt="2026-04-06T14:51:55.378" v="7955" actId="20577"/>
+          <ac:chgData name="Kortis, Adam" userId="0598b173-926b-455a-a07c-3afc69446909" providerId="ADAL" clId="{2705B347-3F5C-4794-B861-E067CD88D9DB}" dt="2026-04-08T14:26:09.040" v="8248" actId="20577"/>
           <ac:spMkLst>
             <pc:docMk/>
             <pc:sldMk cId="2491955574" sldId="270"/>
@@ -626,7 +618,7 @@
           <a:p>
             <a:fld id="{2288AEB0-C08C-4305-915B-CAF733B69B29}" type="datetimeFigureOut">
               <a:rPr lang="en-US" smtClean="0"/>
-              <a:t>4/6/2026</a:t>
+              <a:t>4/8/2026</a:t>
             </a:fld>
             <a:endParaRPr lang="en-US"/>
           </a:p>
@@ -1145,7 +1137,7 @@
           <a:p>
             <a:fld id="{DC00B611-A437-4A1C-AF17-82A64D909590}" type="datetimeFigureOut">
               <a:rPr lang="en-US" smtClean="0"/>
-              <a:t>4/6/2026</a:t>
+              <a:t>4/8/2026</a:t>
             </a:fld>
             <a:endParaRPr lang="en-US"/>
           </a:p>
@@ -1380,7 +1372,7 @@
           <a:p>
             <a:fld id="{DC00B611-A437-4A1C-AF17-82A64D909590}" type="datetimeFigureOut">
               <a:rPr lang="en-US" smtClean="0"/>
-              <a:t>4/6/2026</a:t>
+              <a:t>4/8/2026</a:t>
             </a:fld>
             <a:endParaRPr lang="en-US"/>
           </a:p>
@@ -1560,7 +1552,7 @@
           <a:p>
             <a:fld id="{DC00B611-A437-4A1C-AF17-82A64D909590}" type="datetimeFigureOut">
               <a:rPr lang="en-US" smtClean="0"/>
-              <a:t>4/6/2026</a:t>
+              <a:t>4/8/2026</a:t>
             </a:fld>
             <a:endParaRPr lang="en-US"/>
           </a:p>
@@ -1730,7 +1722,7 @@
           <a:p>
             <a:fld id="{DC00B611-A437-4A1C-AF17-82A64D909590}" type="datetimeFigureOut">
               <a:rPr lang="en-US" smtClean="0"/>
-              <a:t>4/6/2026</a:t>
+              <a:t>4/8/2026</a:t>
             </a:fld>
             <a:endParaRPr lang="en-US"/>
           </a:p>
@@ -1984,7 +1976,7 @@
           <a:p>
             <a:fld id="{DC00B611-A437-4A1C-AF17-82A64D909590}" type="datetimeFigureOut">
               <a:rPr lang="en-US" smtClean="0"/>
-              <a:t>4/6/2026</a:t>
+              <a:t>4/8/2026</a:t>
             </a:fld>
             <a:endParaRPr lang="en-US"/>
           </a:p>
@@ -2310,7 +2302,7 @@
           <a:p>
             <a:fld id="{DC00B611-A437-4A1C-AF17-82A64D909590}" type="datetimeFigureOut">
               <a:rPr lang="en-US" smtClean="0"/>
-              <a:t>4/6/2026</a:t>
+              <a:t>4/8/2026</a:t>
             </a:fld>
             <a:endParaRPr lang="en-US"/>
           </a:p>
@@ -2761,7 +2753,7 @@
           <a:p>
             <a:fld id="{DC00B611-A437-4A1C-AF17-82A64D909590}" type="datetimeFigureOut">
               <a:rPr lang="en-US" smtClean="0"/>
-              <a:t>4/6/2026</a:t>
+              <a:t>4/8/2026</a:t>
             </a:fld>
             <a:endParaRPr lang="en-US"/>
           </a:p>
@@ -2879,7 +2871,7 @@
           <a:p>
             <a:fld id="{DC00B611-A437-4A1C-AF17-82A64D909590}" type="datetimeFigureOut">
               <a:rPr lang="en-US" smtClean="0"/>
-              <a:t>4/6/2026</a:t>
+              <a:t>4/8/2026</a:t>
             </a:fld>
             <a:endParaRPr lang="en-US"/>
           </a:p>
@@ -2974,7 +2966,7 @@
           <a:p>
             <a:fld id="{DC00B611-A437-4A1C-AF17-82A64D909590}" type="datetimeFigureOut">
               <a:rPr lang="en-US" smtClean="0"/>
-              <a:t>4/6/2026</a:t>
+              <a:t>4/8/2026</a:t>
             </a:fld>
             <a:endParaRPr lang="en-US"/>
           </a:p>
@@ -3261,7 +3253,7 @@
           <a:p>
             <a:fld id="{DC00B611-A437-4A1C-AF17-82A64D909590}" type="datetimeFigureOut">
               <a:rPr lang="en-US" smtClean="0"/>
-              <a:t>4/6/2026</a:t>
+              <a:t>4/8/2026</a:t>
             </a:fld>
             <a:endParaRPr lang="en-US"/>
           </a:p>
@@ -3583,7 +3575,7 @@
           <a:p>
             <a:fld id="{DC00B611-A437-4A1C-AF17-82A64D909590}" type="datetimeFigureOut">
               <a:rPr lang="en-US" smtClean="0"/>
-              <a:t>4/6/2026</a:t>
+              <a:t>4/8/2026</a:t>
             </a:fld>
             <a:endParaRPr lang="en-US"/>
           </a:p>
@@ -3844,7 +3836,7 @@
           <a:p>
             <a:fld id="{DC00B611-A437-4A1C-AF17-82A64D909590}" type="datetimeFigureOut">
               <a:rPr lang="en-US" smtClean="0"/>
-              <a:t>4/6/2026</a:t>
+              <a:t>4/8/2026</a:t>
             </a:fld>
             <a:endParaRPr lang="en-US"/>
           </a:p>
@@ -4660,7 +4652,7 @@
           <a:p>
             <a:r>
               <a:rPr lang="en-US" dirty="0"/>
-              <a:t>Install typical software install:</a:t>
+              <a:t>Typical software install:</a:t>
             </a:r>
           </a:p>
           <a:p>
@@ -4924,7 +4916,7 @@
             <a:pPr lvl="1"/>
             <a:r>
               <a:rPr lang="en-US" dirty="0"/>
-              <a:t>Scikit Learn, Tensor Flow – Machine Learning</a:t>
+              <a:t>Scikit Learn, Tensor Flow – Machine Learning/Modelling</a:t>
             </a:r>
           </a:p>
           <a:p>
@@ -5084,6 +5076,13 @@
             <a:pPr lvl="1"/>
             <a:r>
               <a:rPr lang="en-US" dirty="0"/>
+              <a:t>Write code, write more code, and then write some more code</a:t>
+            </a:r>
+          </a:p>
+          <a:p>
+            <a:pPr lvl="1"/>
+            <a:r>
+              <a:rPr lang="en-US" dirty="0"/>
               <a:t>Start simple – do some simple learnings and simple programs</a:t>
             </a:r>
           </a:p>
@@ -5191,7 +5190,15 @@
           <a:p>
             <a:r>
               <a:rPr lang="en-US" dirty="0"/>
-              <a:t>Live Demo VS Code, </a:t>
+              <a:t>Live Demo </a:t>
+            </a:r>
+            <a:r>
+              <a:rPr lang="en-US"/>
+              <a:t>Running Code </a:t>
+            </a:r>
+            <a:r>
+              <a:rPr lang="en-US" dirty="0"/>
+              <a:t>VS Code, </a:t>
             </a:r>
             <a:r>
               <a:rPr lang="en-US" dirty="0" err="1"/>
@@ -5227,10 +5234,9 @@
           </a:p>
           <a:p>
             <a:r>
-              <a:rPr lang="en-US"/>
+              <a:rPr lang="en-US" dirty="0"/>
               <a:t>Marimo</a:t>
             </a:r>
-            <a:endParaRPr lang="en-US" dirty="0"/>
           </a:p>
         </p:txBody>
       </p:sp>
@@ -5589,7 +5595,7 @@
           <a:p>
             <a:r>
               <a:rPr lang="en-US" dirty="0"/>
-              <a:t>Pro</a:t>
+              <a:t>Pros</a:t>
             </a:r>
           </a:p>
         </p:txBody>
@@ -5612,7 +5618,9 @@
         </p:nvSpPr>
         <p:spPr/>
         <p:txBody>
-          <a:bodyPr/>
+          <a:bodyPr>
+            <a:normAutofit fontScale="92500"/>
+          </a:bodyPr>
           <a:lstStyle/>
           <a:p>
             <a:r>
@@ -5649,6 +5657,17 @@
               <a:rPr lang="en-US" dirty="0"/>
               <a:t>Development Speed</a:t>
             </a:r>
+          </a:p>
+          <a:p>
+            <a:r>
+              <a:rPr lang="en-US" dirty="0"/>
+              <a:t>Flexibility/</a:t>
+            </a:r>
+            <a:r>
+              <a:rPr lang="en-US" dirty="0" err="1"/>
+              <a:t>Resuability</a:t>
+            </a:r>
+            <a:endParaRPr lang="en-US" dirty="0"/>
           </a:p>
           <a:p>
             <a:endParaRPr lang="en-US" dirty="0"/>
@@ -5704,7 +5723,9 @@
         </p:nvSpPr>
         <p:spPr/>
         <p:txBody>
-          <a:bodyPr/>
+          <a:bodyPr>
+            <a:normAutofit fontScale="92500"/>
+          </a:bodyPr>
           <a:lstStyle/>
           <a:p>
             <a:r>
@@ -5715,7 +5736,7 @@
           <a:p>
             <a:r>
               <a:rPr lang="en-US" dirty="0"/>
-              <a:t>Learning the language</a:t>
+              <a:t>Learning the language (coding/CS)</a:t>
             </a:r>
           </a:p>
           <a:p>
@@ -6027,7 +6048,7 @@
             </a:r>
             <a:r>
               <a:rPr lang="en-US" dirty="0"/>
-              <a:t>\Local\Programs\Python\Python&lt;version&gt;</a:t>
+              <a:t>\Local\Programs\Python\1&lt;version&gt;</a:t>
             </a:r>
           </a:p>
           <a:p>
@@ -6041,7 +6062,7 @@
             <a:pPr lvl="2"/>
             <a:r>
               <a:rPr lang="en-US" dirty="0"/>
-              <a:t>C:\Users\KOR9SP\AppData\Local\Programs\Python\Python311\Scripts</a:t>
+              <a:t>C:\Users\&lt;User Name&gt;\AppData\Local\Programs\Python\&lt;version&gt;\Scripts</a:t>
             </a:r>
           </a:p>
           <a:p>
@@ -6617,7 +6638,7 @@
           <a:p>
             <a:r>
               <a:rPr lang="en-US" dirty="0"/>
-              <a:t>Learn the editor as well</a:t>
+              <a:t>Learn the editor</a:t>
             </a:r>
           </a:p>
           <a:p>

--- a/Getting Started with Python for Data Analytics.pptx
+++ b/Getting Started with Python for Data Analytics.pptx
@@ -128,12 +128,20 @@
 </p:presentation>
 </file>
 
+<file path=ppt/revisionInfo.xml><?xml version="1.0" encoding="utf-8"?>
+<p1510:revInfo xmlns:a="http://schemas.openxmlformats.org/drawingml/2006/main" xmlns:r="http://schemas.openxmlformats.org/officeDocument/2006/relationships" xmlns:p1510="http://schemas.microsoft.com/office/powerpoint/2015/10/main">
+  <p1510:revLst>
+    <p1510:client id="{EC6BE08D-F12C-446D-BA2C-EB85838FE8C6}" v="1" dt="2026-04-10T14:30:17.793"/>
+  </p1510:revLst>
+</p1510:revInfo>
+</file>
+
 <file path=ppt/changesInfos/changesInfo1.xml><?xml version="1.0" encoding="utf-8"?>
 <pc:chgInfo xmlns:a="http://schemas.openxmlformats.org/drawingml/2006/main" xmlns:r="http://schemas.openxmlformats.org/officeDocument/2006/relationships" xmlns:ac="http://schemas.microsoft.com/office/drawing/2013/main/command" xmlns:pc="http://schemas.microsoft.com/office/powerpoint/2013/main/command">
   <pc:docChgLst>
     <pc:chgData name="Kortis, Adam" userId="0598b173-926b-455a-a07c-3afc69446909" providerId="ADAL" clId="{2705B347-3F5C-4794-B861-E067CD88D9DB}"/>
     <pc:docChg chg="undo custSel addSld delSld modSld">
-      <pc:chgData name="Kortis, Adam" userId="0598b173-926b-455a-a07c-3afc69446909" providerId="ADAL" clId="{2705B347-3F5C-4794-B861-E067CD88D9DB}" dt="2026-04-08T14:28:55.693" v="8362" actId="20577"/>
+      <pc:chgData name="Kortis, Adam" userId="0598b173-926b-455a-a07c-3afc69446909" providerId="ADAL" clId="{2705B347-3F5C-4794-B861-E067CD88D9DB}" dt="2026-04-10T14:30:17.793" v="8363"/>
       <pc:docMkLst>
         <pc:docMk/>
       </pc:docMkLst>
@@ -184,7 +192,7 @@
         </pc:spChg>
       </pc:sldChg>
       <pc:sldChg chg="modSp new mod">
-        <pc:chgData name="Kortis, Adam" userId="0598b173-926b-455a-a07c-3afc69446909" providerId="ADAL" clId="{2705B347-3F5C-4794-B861-E067CD88D9DB}" dt="2026-04-07T13:22:02.726" v="8149" actId="27636"/>
+        <pc:chgData name="Kortis, Adam" userId="0598b173-926b-455a-a07c-3afc69446909" providerId="ADAL" clId="{2705B347-3F5C-4794-B861-E067CD88D9DB}" dt="2026-04-10T14:30:17.793" v="8363"/>
         <pc:sldMkLst>
           <pc:docMk/>
           <pc:sldMk cId="910298586" sldId="258"/>
@@ -198,7 +206,7 @@
           </ac:spMkLst>
         </pc:spChg>
         <pc:spChg chg="mod">
-          <ac:chgData name="Kortis, Adam" userId="0598b173-926b-455a-a07c-3afc69446909" providerId="ADAL" clId="{2705B347-3F5C-4794-B861-E067CD88D9DB}" dt="2026-04-07T13:22:02.726" v="8149" actId="27636"/>
+          <ac:chgData name="Kortis, Adam" userId="0598b173-926b-455a-a07c-3afc69446909" providerId="ADAL" clId="{2705B347-3F5C-4794-B861-E067CD88D9DB}" dt="2026-04-10T14:30:17.793" v="8363"/>
           <ac:spMkLst>
             <pc:docMk/>
             <pc:sldMk cId="910298586" sldId="258"/>
@@ -618,7 +626,7 @@
           <a:p>
             <a:fld id="{2288AEB0-C08C-4305-915B-CAF733B69B29}" type="datetimeFigureOut">
               <a:rPr lang="en-US" smtClean="0"/>
-              <a:t>4/8/2026</a:t>
+              <a:t>4/10/2026</a:t>
             </a:fld>
             <a:endParaRPr lang="en-US"/>
           </a:p>
@@ -1137,7 +1145,7 @@
           <a:p>
             <a:fld id="{DC00B611-A437-4A1C-AF17-82A64D909590}" type="datetimeFigureOut">
               <a:rPr lang="en-US" smtClean="0"/>
-              <a:t>4/8/2026</a:t>
+              <a:t>4/10/2026</a:t>
             </a:fld>
             <a:endParaRPr lang="en-US"/>
           </a:p>
@@ -1372,7 +1380,7 @@
           <a:p>
             <a:fld id="{DC00B611-A437-4A1C-AF17-82A64D909590}" type="datetimeFigureOut">
               <a:rPr lang="en-US" smtClean="0"/>
-              <a:t>4/8/2026</a:t>
+              <a:t>4/10/2026</a:t>
             </a:fld>
             <a:endParaRPr lang="en-US"/>
           </a:p>
@@ -1552,7 +1560,7 @@
           <a:p>
             <a:fld id="{DC00B611-A437-4A1C-AF17-82A64D909590}" type="datetimeFigureOut">
               <a:rPr lang="en-US" smtClean="0"/>
-              <a:t>4/8/2026</a:t>
+              <a:t>4/10/2026</a:t>
             </a:fld>
             <a:endParaRPr lang="en-US"/>
           </a:p>
@@ -1722,7 +1730,7 @@
           <a:p>
             <a:fld id="{DC00B611-A437-4A1C-AF17-82A64D909590}" type="datetimeFigureOut">
               <a:rPr lang="en-US" smtClean="0"/>
-              <a:t>4/8/2026</a:t>
+              <a:t>4/10/2026</a:t>
             </a:fld>
             <a:endParaRPr lang="en-US"/>
           </a:p>
@@ -1976,7 +1984,7 @@
           <a:p>
             <a:fld id="{DC00B611-A437-4A1C-AF17-82A64D909590}" type="datetimeFigureOut">
               <a:rPr lang="en-US" smtClean="0"/>
-              <a:t>4/8/2026</a:t>
+              <a:t>4/10/2026</a:t>
             </a:fld>
             <a:endParaRPr lang="en-US"/>
           </a:p>
@@ -2302,7 +2310,7 @@
           <a:p>
             <a:fld id="{DC00B611-A437-4A1C-AF17-82A64D909590}" type="datetimeFigureOut">
               <a:rPr lang="en-US" smtClean="0"/>
-              <a:t>4/8/2026</a:t>
+              <a:t>4/10/2026</a:t>
             </a:fld>
             <a:endParaRPr lang="en-US"/>
           </a:p>
@@ -2753,7 +2761,7 @@
           <a:p>
             <a:fld id="{DC00B611-A437-4A1C-AF17-82A64D909590}" type="datetimeFigureOut">
               <a:rPr lang="en-US" smtClean="0"/>
-              <a:t>4/8/2026</a:t>
+              <a:t>4/10/2026</a:t>
             </a:fld>
             <a:endParaRPr lang="en-US"/>
           </a:p>
@@ -2871,7 +2879,7 @@
           <a:p>
             <a:fld id="{DC00B611-A437-4A1C-AF17-82A64D909590}" type="datetimeFigureOut">
               <a:rPr lang="en-US" smtClean="0"/>
-              <a:t>4/8/2026</a:t>
+              <a:t>4/10/2026</a:t>
             </a:fld>
             <a:endParaRPr lang="en-US"/>
           </a:p>
@@ -2966,7 +2974,7 @@
           <a:p>
             <a:fld id="{DC00B611-A437-4A1C-AF17-82A64D909590}" type="datetimeFigureOut">
               <a:rPr lang="en-US" smtClean="0"/>
-              <a:t>4/8/2026</a:t>
+              <a:t>4/10/2026</a:t>
             </a:fld>
             <a:endParaRPr lang="en-US"/>
           </a:p>
@@ -3253,7 +3261,7 @@
           <a:p>
             <a:fld id="{DC00B611-A437-4A1C-AF17-82A64D909590}" type="datetimeFigureOut">
               <a:rPr lang="en-US" smtClean="0"/>
-              <a:t>4/8/2026</a:t>
+              <a:t>4/10/2026</a:t>
             </a:fld>
             <a:endParaRPr lang="en-US"/>
           </a:p>
@@ -3575,7 +3583,7 @@
           <a:p>
             <a:fld id="{DC00B611-A437-4A1C-AF17-82A64D909590}" type="datetimeFigureOut">
               <a:rPr lang="en-US" smtClean="0"/>
-              <a:t>4/8/2026</a:t>
+              <a:t>4/10/2026</a:t>
             </a:fld>
             <a:endParaRPr lang="en-US"/>
           </a:p>
@@ -3836,7 +3844,7 @@
           <a:p>
             <a:fld id="{DC00B611-A437-4A1C-AF17-82A64D909590}" type="datetimeFigureOut">
               <a:rPr lang="en-US" smtClean="0"/>
-              <a:t>4/8/2026</a:t>
+              <a:t>4/10/2026</a:t>
             </a:fld>
             <a:endParaRPr lang="en-US"/>
           </a:p>
@@ -5509,7 +5517,7 @@
           <a:p>
             <a:r>
               <a:rPr lang="en-US" dirty="0"/>
-              <a:t>https://github.com/AdamKortis</a:t>
+              <a:t>https://github.com/AdamKortis/cchmc_python_getting_started</a:t>
             </a:r>
           </a:p>
         </p:txBody>

--- a/Getting Started with Python for Data Analytics.pptx
+++ b/Getting Started with Python for Data Analytics.pptx
@@ -5,23 +5,28 @@
     <p:sldMasterId id="2147483660" r:id="rId1"/>
   </p:sldMasterIdLst>
   <p:notesMasterIdLst>
-    <p:notesMasterId r:id="rId16"/>
+    <p:notesMasterId r:id="rId21"/>
   </p:notesMasterIdLst>
   <p:sldIdLst>
     <p:sldId id="256" r:id="rId2"/>
-    <p:sldId id="257" r:id="rId3"/>
-    <p:sldId id="258" r:id="rId4"/>
-    <p:sldId id="259" r:id="rId5"/>
-    <p:sldId id="269" r:id="rId6"/>
-    <p:sldId id="260" r:id="rId7"/>
-    <p:sldId id="261" r:id="rId8"/>
-    <p:sldId id="262" r:id="rId9"/>
-    <p:sldId id="263" r:id="rId10"/>
-    <p:sldId id="264" r:id="rId11"/>
-    <p:sldId id="265" r:id="rId12"/>
-    <p:sldId id="270" r:id="rId13"/>
-    <p:sldId id="266" r:id="rId14"/>
-    <p:sldId id="268" r:id="rId15"/>
+    <p:sldId id="271" r:id="rId3"/>
+    <p:sldId id="257" r:id="rId4"/>
+    <p:sldId id="258" r:id="rId5"/>
+    <p:sldId id="259" r:id="rId6"/>
+    <p:sldId id="269" r:id="rId7"/>
+    <p:sldId id="260" r:id="rId8"/>
+    <p:sldId id="261" r:id="rId9"/>
+    <p:sldId id="262" r:id="rId10"/>
+    <p:sldId id="263" r:id="rId11"/>
+    <p:sldId id="264" r:id="rId12"/>
+    <p:sldId id="272" r:id="rId13"/>
+    <p:sldId id="273" r:id="rId14"/>
+    <p:sldId id="265" r:id="rId15"/>
+    <p:sldId id="274" r:id="rId16"/>
+    <p:sldId id="275" r:id="rId17"/>
+    <p:sldId id="270" r:id="rId18"/>
+    <p:sldId id="266" r:id="rId19"/>
+    <p:sldId id="268" r:id="rId20"/>
   </p:sldIdLst>
   <p:sldSz cx="12192000" cy="6858000"/>
   <p:notesSz cx="6858000" cy="9144000"/>
@@ -131,7 +136,7 @@
 <file path=ppt/revisionInfo.xml><?xml version="1.0" encoding="utf-8"?>
 <p1510:revInfo xmlns:a="http://schemas.openxmlformats.org/drawingml/2006/main" xmlns:r="http://schemas.openxmlformats.org/officeDocument/2006/relationships" xmlns:p1510="http://schemas.microsoft.com/office/powerpoint/2015/10/main">
   <p1510:revLst>
-    <p1510:client id="{EC6BE08D-F12C-446D-BA2C-EB85838FE8C6}" v="1" dt="2026-04-10T14:30:17.793"/>
+    <p1510:client id="{EC6BE08D-F12C-446D-BA2C-EB85838FE8C6}" v="15" dt="2026-04-14T16:43:36.848"/>
   </p1510:revLst>
 </p1510:revInfo>
 </file>
@@ -141,7 +146,7 @@
   <pc:docChgLst>
     <pc:chgData name="Kortis, Adam" userId="0598b173-926b-455a-a07c-3afc69446909" providerId="ADAL" clId="{2705B347-3F5C-4794-B861-E067CD88D9DB}"/>
     <pc:docChg chg="undo custSel addSld delSld modSld">
-      <pc:chgData name="Kortis, Adam" userId="0598b173-926b-455a-a07c-3afc69446909" providerId="ADAL" clId="{2705B347-3F5C-4794-B861-E067CD88D9DB}" dt="2026-04-10T14:30:17.793" v="8363"/>
+      <pc:chgData name="Kortis, Adam" userId="0598b173-926b-455a-a07c-3afc69446909" providerId="ADAL" clId="{2705B347-3F5C-4794-B861-E067CD88D9DB}" dt="2026-04-14T16:45:56.924" v="9167" actId="20577"/>
       <pc:docMkLst>
         <pc:docMk/>
       </pc:docMkLst>
@@ -169,7 +174,7 @@
         </pc:spChg>
       </pc:sldChg>
       <pc:sldChg chg="modSp new mod">
-        <pc:chgData name="Kortis, Adam" userId="0598b173-926b-455a-a07c-3afc69446909" providerId="ADAL" clId="{2705B347-3F5C-4794-B861-E067CD88D9DB}" dt="2026-04-02T17:00:55.937" v="1353" actId="20577"/>
+        <pc:chgData name="Kortis, Adam" userId="0598b173-926b-455a-a07c-3afc69446909" providerId="ADAL" clId="{2705B347-3F5C-4794-B861-E067CD88D9DB}" dt="2026-04-14T14:36:31.522" v="8818" actId="20577"/>
         <pc:sldMkLst>
           <pc:docMk/>
           <pc:sldMk cId="541880142" sldId="257"/>
@@ -183,7 +188,7 @@
           </ac:spMkLst>
         </pc:spChg>
         <pc:spChg chg="mod">
-          <ac:chgData name="Kortis, Adam" userId="0598b173-926b-455a-a07c-3afc69446909" providerId="ADAL" clId="{2705B347-3F5C-4794-B861-E067CD88D9DB}" dt="2026-04-02T17:00:55.937" v="1353" actId="20577"/>
+          <ac:chgData name="Kortis, Adam" userId="0598b173-926b-455a-a07c-3afc69446909" providerId="ADAL" clId="{2705B347-3F5C-4794-B861-E067CD88D9DB}" dt="2026-04-14T14:36:31.522" v="8818" actId="20577"/>
           <ac:spMkLst>
             <pc:docMk/>
             <pc:sldMk cId="541880142" sldId="257"/>
@@ -262,7 +267,7 @@
         </pc:spChg>
       </pc:sldChg>
       <pc:sldChg chg="modSp new mod modNotesTx">
-        <pc:chgData name="Kortis, Adam" userId="0598b173-926b-455a-a07c-3afc69446909" providerId="ADAL" clId="{2705B347-3F5C-4794-B861-E067CD88D9DB}" dt="2026-04-08T14:18:51.294" v="8222" actId="20577"/>
+        <pc:chgData name="Kortis, Adam" userId="0598b173-926b-455a-a07c-3afc69446909" providerId="ADAL" clId="{2705B347-3F5C-4794-B861-E067CD88D9DB}" dt="2026-04-14T16:45:56.924" v="9167" actId="20577"/>
         <pc:sldMkLst>
           <pc:docMk/>
           <pc:sldMk cId="2877614386" sldId="260"/>
@@ -276,7 +281,7 @@
           </ac:spMkLst>
         </pc:spChg>
         <pc:spChg chg="mod">
-          <ac:chgData name="Kortis, Adam" userId="0598b173-926b-455a-a07c-3afc69446909" providerId="ADAL" clId="{2705B347-3F5C-4794-B861-E067CD88D9DB}" dt="2026-04-08T14:18:51.294" v="8222" actId="20577"/>
+          <ac:chgData name="Kortis, Adam" userId="0598b173-926b-455a-a07c-3afc69446909" providerId="ADAL" clId="{2705B347-3F5C-4794-B861-E067CD88D9DB}" dt="2026-04-14T16:45:56.924" v="9167" actId="20577"/>
           <ac:spMkLst>
             <pc:docMk/>
             <pc:sldMk cId="2877614386" sldId="260"/>
@@ -402,7 +407,7 @@
         </pc:spChg>
       </pc:sldChg>
       <pc:sldChg chg="modSp new mod">
-        <pc:chgData name="Kortis, Adam" userId="0598b173-926b-455a-a07c-3afc69446909" providerId="ADAL" clId="{2705B347-3F5C-4794-B861-E067CD88D9DB}" dt="2026-04-02T18:53:09.053" v="5879"/>
+        <pc:chgData name="Kortis, Adam" userId="0598b173-926b-455a-a07c-3afc69446909" providerId="ADAL" clId="{2705B347-3F5C-4794-B861-E067CD88D9DB}" dt="2026-04-14T14:37:50.993" v="8898" actId="20577"/>
         <pc:sldMkLst>
           <pc:docMk/>
           <pc:sldMk cId="796140452" sldId="264"/>
@@ -416,7 +421,7 @@
           </ac:spMkLst>
         </pc:spChg>
         <pc:spChg chg="mod">
-          <ac:chgData name="Kortis, Adam" userId="0598b173-926b-455a-a07c-3afc69446909" providerId="ADAL" clId="{2705B347-3F5C-4794-B861-E067CD88D9DB}" dt="2026-04-02T18:53:09.053" v="5879"/>
+          <ac:chgData name="Kortis, Adam" userId="0598b173-926b-455a-a07c-3afc69446909" providerId="ADAL" clId="{2705B347-3F5C-4794-B861-E067CD88D9DB}" dt="2026-04-14T14:37:50.993" v="8898" actId="20577"/>
           <ac:spMkLst>
             <pc:docMk/>
             <pc:sldMk cId="796140452" sldId="264"/>
@@ -539,6 +544,256 @@
           </ac:spMkLst>
         </pc:spChg>
       </pc:sldChg>
+      <pc:sldChg chg="modSp new mod">
+        <pc:chgData name="Kortis, Adam" userId="0598b173-926b-455a-a07c-3afc69446909" providerId="ADAL" clId="{2705B347-3F5C-4794-B861-E067CD88D9DB}" dt="2026-04-14T14:19:41.830" v="8674" actId="20577"/>
+        <pc:sldMkLst>
+          <pc:docMk/>
+          <pc:sldMk cId="2043150458" sldId="271"/>
+        </pc:sldMkLst>
+        <pc:spChg chg="mod">
+          <ac:chgData name="Kortis, Adam" userId="0598b173-926b-455a-a07c-3afc69446909" providerId="ADAL" clId="{2705B347-3F5C-4794-B861-E067CD88D9DB}" dt="2026-04-14T14:18:04.227" v="8455" actId="20577"/>
+          <ac:spMkLst>
+            <pc:docMk/>
+            <pc:sldMk cId="2043150458" sldId="271"/>
+            <ac:spMk id="2" creationId="{161ECF88-F862-534E-1D40-0C52B7E3D3BE}"/>
+          </ac:spMkLst>
+        </pc:spChg>
+        <pc:spChg chg="mod">
+          <ac:chgData name="Kortis, Adam" userId="0598b173-926b-455a-a07c-3afc69446909" providerId="ADAL" clId="{2705B347-3F5C-4794-B861-E067CD88D9DB}" dt="2026-04-14T14:19:41.830" v="8674" actId="20577"/>
+          <ac:spMkLst>
+            <pc:docMk/>
+            <pc:sldMk cId="2043150458" sldId="271"/>
+            <ac:spMk id="3" creationId="{6FB44663-3157-0939-1980-DAAD6A9964FC}"/>
+          </ac:spMkLst>
+        </pc:spChg>
+      </pc:sldChg>
+      <pc:sldChg chg="addSp modSp new mod">
+        <pc:chgData name="Kortis, Adam" userId="0598b173-926b-455a-a07c-3afc69446909" providerId="ADAL" clId="{2705B347-3F5C-4794-B861-E067CD88D9DB}" dt="2026-04-14T16:33:58.147" v="8905" actId="1076"/>
+        <pc:sldMkLst>
+          <pc:docMk/>
+          <pc:sldMk cId="3772174815" sldId="272"/>
+        </pc:sldMkLst>
+        <pc:picChg chg="add mod">
+          <ac:chgData name="Kortis, Adam" userId="0598b173-926b-455a-a07c-3afc69446909" providerId="ADAL" clId="{2705B347-3F5C-4794-B861-E067CD88D9DB}" dt="2026-04-14T16:33:13.684" v="8902" actId="1076"/>
+          <ac:picMkLst>
+            <pc:docMk/>
+            <pc:sldMk cId="3772174815" sldId="272"/>
+            <ac:picMk id="3" creationId="{EE4175D9-873C-E8A9-7791-B8E1938576D7}"/>
+          </ac:picMkLst>
+        </pc:picChg>
+        <pc:picChg chg="add mod">
+          <ac:chgData name="Kortis, Adam" userId="0598b173-926b-455a-a07c-3afc69446909" providerId="ADAL" clId="{2705B347-3F5C-4794-B861-E067CD88D9DB}" dt="2026-04-14T16:33:58.147" v="8905" actId="1076"/>
+          <ac:picMkLst>
+            <pc:docMk/>
+            <pc:sldMk cId="3772174815" sldId="272"/>
+            <ac:picMk id="5" creationId="{B4EB7A16-FD41-07CD-827F-D608ED12E7F0}"/>
+          </ac:picMkLst>
+        </pc:picChg>
+      </pc:sldChg>
+      <pc:sldChg chg="addSp modSp new mod">
+        <pc:chgData name="Kortis, Adam" userId="0598b173-926b-455a-a07c-3afc69446909" providerId="ADAL" clId="{2705B347-3F5C-4794-B861-E067CD88D9DB}" dt="2026-04-14T16:35:23.737" v="8920" actId="14100"/>
+        <pc:sldMkLst>
+          <pc:docMk/>
+          <pc:sldMk cId="2735913048" sldId="273"/>
+        </pc:sldMkLst>
+        <pc:spChg chg="add mod">
+          <ac:chgData name="Kortis, Adam" userId="0598b173-926b-455a-a07c-3afc69446909" providerId="ADAL" clId="{2705B347-3F5C-4794-B861-E067CD88D9DB}" dt="2026-04-14T16:35:16.939" v="8916" actId="14100"/>
+          <ac:spMkLst>
+            <pc:docMk/>
+            <pc:sldMk cId="2735913048" sldId="273"/>
+            <ac:spMk id="6" creationId="{218091C4-BF42-2066-FF60-FD5DB8206FC4}"/>
+          </ac:spMkLst>
+        </pc:spChg>
+        <pc:spChg chg="add mod">
+          <ac:chgData name="Kortis, Adam" userId="0598b173-926b-455a-a07c-3afc69446909" providerId="ADAL" clId="{2705B347-3F5C-4794-B861-E067CD88D9DB}" dt="2026-04-14T16:35:23.737" v="8920" actId="14100"/>
+          <ac:spMkLst>
+            <pc:docMk/>
+            <pc:sldMk cId="2735913048" sldId="273"/>
+            <ac:spMk id="7" creationId="{DB647302-83DD-F215-968C-948E63C4C6F1}"/>
+          </ac:spMkLst>
+        </pc:spChg>
+        <pc:picChg chg="add mod">
+          <ac:chgData name="Kortis, Adam" userId="0598b173-926b-455a-a07c-3afc69446909" providerId="ADAL" clId="{2705B347-3F5C-4794-B861-E067CD88D9DB}" dt="2026-04-14T16:34:40.070" v="8909" actId="1076"/>
+          <ac:picMkLst>
+            <pc:docMk/>
+            <pc:sldMk cId="2735913048" sldId="273"/>
+            <ac:picMk id="3" creationId="{84ECC3FB-5F8C-CFC3-2032-6850545E8928}"/>
+          </ac:picMkLst>
+        </pc:picChg>
+        <pc:picChg chg="add mod">
+          <ac:chgData name="Kortis, Adam" userId="0598b173-926b-455a-a07c-3afc69446909" providerId="ADAL" clId="{2705B347-3F5C-4794-B861-E067CD88D9DB}" dt="2026-04-14T16:34:57.845" v="8912" actId="1076"/>
+          <ac:picMkLst>
+            <pc:docMk/>
+            <pc:sldMk cId="2735913048" sldId="273"/>
+            <ac:picMk id="5" creationId="{2F80A413-BB58-94DE-2B3F-946A3FA5C8BE}"/>
+          </ac:picMkLst>
+        </pc:picChg>
+      </pc:sldChg>
+      <pc:sldChg chg="new del">
+        <pc:chgData name="Kortis, Adam" userId="0598b173-926b-455a-a07c-3afc69446909" providerId="ADAL" clId="{2705B347-3F5C-4794-B861-E067CD88D9DB}" dt="2026-04-14T16:36:10.969" v="8922" actId="47"/>
+        <pc:sldMkLst>
+          <pc:docMk/>
+          <pc:sldMk cId="762557880" sldId="274"/>
+        </pc:sldMkLst>
+      </pc:sldChg>
+      <pc:sldChg chg="addSp modSp new mod">
+        <pc:chgData name="Kortis, Adam" userId="0598b173-926b-455a-a07c-3afc69446909" providerId="ADAL" clId="{2705B347-3F5C-4794-B861-E067CD88D9DB}" dt="2026-04-14T16:39:17.299" v="8992" actId="1076"/>
+        <pc:sldMkLst>
+          <pc:docMk/>
+          <pc:sldMk cId="3490545102" sldId="274"/>
+        </pc:sldMkLst>
+        <pc:spChg chg="add mod">
+          <ac:chgData name="Kortis, Adam" userId="0598b173-926b-455a-a07c-3afc69446909" providerId="ADAL" clId="{2705B347-3F5C-4794-B861-E067CD88D9DB}" dt="2026-04-14T16:39:17.299" v="8992" actId="1076"/>
+          <ac:spMkLst>
+            <pc:docMk/>
+            <pc:sldMk cId="3490545102" sldId="274"/>
+            <ac:spMk id="6" creationId="{57CEFECD-99AE-F4B0-C1C9-EE78338E554D}"/>
+          </ac:spMkLst>
+        </pc:spChg>
+        <pc:spChg chg="add mod">
+          <ac:chgData name="Kortis, Adam" userId="0598b173-926b-455a-a07c-3afc69446909" providerId="ADAL" clId="{2705B347-3F5C-4794-B861-E067CD88D9DB}" dt="2026-04-14T16:39:17.299" v="8992" actId="1076"/>
+          <ac:spMkLst>
+            <pc:docMk/>
+            <pc:sldMk cId="3490545102" sldId="274"/>
+            <ac:spMk id="7" creationId="{8000F51B-FFA7-DE6C-F844-9A3A76818985}"/>
+          </ac:spMkLst>
+        </pc:spChg>
+        <pc:spChg chg="add mod">
+          <ac:chgData name="Kortis, Adam" userId="0598b173-926b-455a-a07c-3afc69446909" providerId="ADAL" clId="{2705B347-3F5C-4794-B861-E067CD88D9DB}" dt="2026-04-14T16:39:17.299" v="8992" actId="1076"/>
+          <ac:spMkLst>
+            <pc:docMk/>
+            <pc:sldMk cId="3490545102" sldId="274"/>
+            <ac:spMk id="8" creationId="{B70FEFC2-E951-6164-9A43-57E526FD14B3}"/>
+          </ac:spMkLst>
+        </pc:spChg>
+        <pc:spChg chg="add mod">
+          <ac:chgData name="Kortis, Adam" userId="0598b173-926b-455a-a07c-3afc69446909" providerId="ADAL" clId="{2705B347-3F5C-4794-B861-E067CD88D9DB}" dt="2026-04-14T16:39:17.299" v="8992" actId="1076"/>
+          <ac:spMkLst>
+            <pc:docMk/>
+            <pc:sldMk cId="3490545102" sldId="274"/>
+            <ac:spMk id="9" creationId="{BC711F26-90B2-508A-419E-2128113B261F}"/>
+          </ac:spMkLst>
+        </pc:spChg>
+        <pc:picChg chg="add mod">
+          <ac:chgData name="Kortis, Adam" userId="0598b173-926b-455a-a07c-3afc69446909" providerId="ADAL" clId="{2705B347-3F5C-4794-B861-E067CD88D9DB}" dt="2026-04-14T16:39:17.299" v="8992" actId="1076"/>
+          <ac:picMkLst>
+            <pc:docMk/>
+            <pc:sldMk cId="3490545102" sldId="274"/>
+            <ac:picMk id="3" creationId="{8EF1F6F9-D478-4C56-85A4-C07BDF1B1E76}"/>
+          </ac:picMkLst>
+        </pc:picChg>
+        <pc:picChg chg="add mod">
+          <ac:chgData name="Kortis, Adam" userId="0598b173-926b-455a-a07c-3afc69446909" providerId="ADAL" clId="{2705B347-3F5C-4794-B861-E067CD88D9DB}" dt="2026-04-14T16:39:17.299" v="8992" actId="1076"/>
+          <ac:picMkLst>
+            <pc:docMk/>
+            <pc:sldMk cId="3490545102" sldId="274"/>
+            <ac:picMk id="5" creationId="{0E8DA516-258E-1C98-4A47-7DC5B3A46C59}"/>
+          </ac:picMkLst>
+        </pc:picChg>
+      </pc:sldChg>
+      <pc:sldChg chg="addSp modSp new mod">
+        <pc:chgData name="Kortis, Adam" userId="0598b173-926b-455a-a07c-3afc69446909" providerId="ADAL" clId="{2705B347-3F5C-4794-B861-E067CD88D9DB}" dt="2026-04-14T16:44:20.749" v="9166" actId="1036"/>
+        <pc:sldMkLst>
+          <pc:docMk/>
+          <pc:sldMk cId="575848268" sldId="275"/>
+        </pc:sldMkLst>
+        <pc:spChg chg="add mod">
+          <ac:chgData name="Kortis, Adam" userId="0598b173-926b-455a-a07c-3afc69446909" providerId="ADAL" clId="{2705B347-3F5C-4794-B861-E067CD88D9DB}" dt="2026-04-14T16:44:20.749" v="9166" actId="1036"/>
+          <ac:spMkLst>
+            <pc:docMk/>
+            <pc:sldMk cId="575848268" sldId="275"/>
+            <ac:spMk id="3" creationId="{2210F1C8-568F-97D2-C505-3EADFAEBEF6E}"/>
+          </ac:spMkLst>
+        </pc:spChg>
+        <pc:spChg chg="add mod">
+          <ac:chgData name="Kortis, Adam" userId="0598b173-926b-455a-a07c-3afc69446909" providerId="ADAL" clId="{2705B347-3F5C-4794-B861-E067CD88D9DB}" dt="2026-04-14T16:43:16.243" v="9087" actId="1076"/>
+          <ac:spMkLst>
+            <pc:docMk/>
+            <pc:sldMk cId="575848268" sldId="275"/>
+            <ac:spMk id="8" creationId="{F7B5C6AA-F1F5-4865-4577-88F77B99103B}"/>
+          </ac:spMkLst>
+        </pc:spChg>
+        <pc:spChg chg="add mod">
+          <ac:chgData name="Kortis, Adam" userId="0598b173-926b-455a-a07c-3afc69446909" providerId="ADAL" clId="{2705B347-3F5C-4794-B861-E067CD88D9DB}" dt="2026-04-14T16:43:11.860" v="9086" actId="1076"/>
+          <ac:spMkLst>
+            <pc:docMk/>
+            <pc:sldMk cId="575848268" sldId="275"/>
+            <ac:spMk id="9" creationId="{1FDD3D63-9E7D-E75B-A56D-462CBC9D1212}"/>
+          </ac:spMkLst>
+        </pc:spChg>
+        <pc:spChg chg="add mod">
+          <ac:chgData name="Kortis, Adam" userId="0598b173-926b-455a-a07c-3afc69446909" providerId="ADAL" clId="{2705B347-3F5C-4794-B861-E067CD88D9DB}" dt="2026-04-14T16:42:09.147" v="9019" actId="1076"/>
+          <ac:spMkLst>
+            <pc:docMk/>
+            <pc:sldMk cId="575848268" sldId="275"/>
+            <ac:spMk id="12" creationId="{D756BBA2-97AE-01BB-96C2-B2FD8340DBCF}"/>
+          </ac:spMkLst>
+        </pc:spChg>
+        <pc:spChg chg="add mod">
+          <ac:chgData name="Kortis, Adam" userId="0598b173-926b-455a-a07c-3afc69446909" providerId="ADAL" clId="{2705B347-3F5C-4794-B861-E067CD88D9DB}" dt="2026-04-14T16:43:25.829" v="9092" actId="1076"/>
+          <ac:spMkLst>
+            <pc:docMk/>
+            <pc:sldMk cId="575848268" sldId="275"/>
+            <ac:spMk id="13" creationId="{5C4DD2EA-DC94-97E7-C960-05F8FD82D4FF}"/>
+          </ac:spMkLst>
+        </pc:spChg>
+        <pc:spChg chg="add mod">
+          <ac:chgData name="Kortis, Adam" userId="0598b173-926b-455a-a07c-3afc69446909" providerId="ADAL" clId="{2705B347-3F5C-4794-B861-E067CD88D9DB}" dt="2026-04-14T16:43:29.298" v="9093" actId="1076"/>
+          <ac:spMkLst>
+            <pc:docMk/>
+            <pc:sldMk cId="575848268" sldId="275"/>
+            <ac:spMk id="14" creationId="{3E724BC9-7AC0-FC90-151B-E7BD23F25D2E}"/>
+          </ac:spMkLst>
+        </pc:spChg>
+        <pc:spChg chg="add mod">
+          <ac:chgData name="Kortis, Adam" userId="0598b173-926b-455a-a07c-3afc69446909" providerId="ADAL" clId="{2705B347-3F5C-4794-B861-E067CD88D9DB}" dt="2026-04-14T16:44:06.514" v="9160" actId="1076"/>
+          <ac:spMkLst>
+            <pc:docMk/>
+            <pc:sldMk cId="575848268" sldId="275"/>
+            <ac:spMk id="15" creationId="{5C90A91B-BADA-872E-CC47-B15C0DA8A743}"/>
+          </ac:spMkLst>
+        </pc:spChg>
+        <pc:spChg chg="add mod">
+          <ac:chgData name="Kortis, Adam" userId="0598b173-926b-455a-a07c-3afc69446909" providerId="ADAL" clId="{2705B347-3F5C-4794-B861-E067CD88D9DB}" dt="2026-04-14T16:43:45.869" v="9108" actId="20577"/>
+          <ac:spMkLst>
+            <pc:docMk/>
+            <pc:sldMk cId="575848268" sldId="275"/>
+            <ac:spMk id="16" creationId="{FE7662CF-64F9-4673-DB08-4E118FF0CE90}"/>
+          </ac:spMkLst>
+        </pc:spChg>
+        <pc:picChg chg="add mod">
+          <ac:chgData name="Kortis, Adam" userId="0598b173-926b-455a-a07c-3afc69446909" providerId="ADAL" clId="{2705B347-3F5C-4794-B861-E067CD88D9DB}" dt="2026-04-14T16:43:18.224" v="9088" actId="1076"/>
+          <ac:picMkLst>
+            <pc:docMk/>
+            <pc:sldMk cId="575848268" sldId="275"/>
+            <ac:picMk id="2" creationId="{D7F7FDA2-C44F-946F-1AEF-2B50C2D8D9BA}"/>
+          </ac:picMkLst>
+        </pc:picChg>
+        <pc:picChg chg="add mod">
+          <ac:chgData name="Kortis, Adam" userId="0598b173-926b-455a-a07c-3afc69446909" providerId="ADAL" clId="{2705B347-3F5C-4794-B861-E067CD88D9DB}" dt="2026-04-14T16:43:11.860" v="9086" actId="1076"/>
+          <ac:picMkLst>
+            <pc:docMk/>
+            <pc:sldMk cId="575848268" sldId="275"/>
+            <ac:picMk id="5" creationId="{4A28BE33-033E-DFDA-5DCF-9954B2272B71}"/>
+          </ac:picMkLst>
+        </pc:picChg>
+        <pc:picChg chg="add mod">
+          <ac:chgData name="Kortis, Adam" userId="0598b173-926b-455a-a07c-3afc69446909" providerId="ADAL" clId="{2705B347-3F5C-4794-B861-E067CD88D9DB}" dt="2026-04-14T16:43:16.243" v="9087" actId="1076"/>
+          <ac:picMkLst>
+            <pc:docMk/>
+            <pc:sldMk cId="575848268" sldId="275"/>
+            <ac:picMk id="7" creationId="{E4182293-86D8-CE00-AE02-42D72CD17B86}"/>
+          </ac:picMkLst>
+        </pc:picChg>
+        <pc:picChg chg="add mod">
+          <ac:chgData name="Kortis, Adam" userId="0598b173-926b-455a-a07c-3afc69446909" providerId="ADAL" clId="{2705B347-3F5C-4794-B861-E067CD88D9DB}" dt="2026-04-14T16:42:09.147" v="9019" actId="1076"/>
+          <ac:picMkLst>
+            <pc:docMk/>
+            <pc:sldMk cId="575848268" sldId="275"/>
+            <ac:picMk id="11" creationId="{0AB5AF4A-B2A1-A984-D632-E59F037DA6AE}"/>
+          </ac:picMkLst>
+        </pc:picChg>
+      </pc:sldChg>
     </pc:docChg>
   </pc:docChgLst>
 </pc:chgInfo>
@@ -626,7 +881,7 @@
           <a:p>
             <a:fld id="{2288AEB0-C08C-4305-915B-CAF733B69B29}" type="datetimeFigureOut">
               <a:rPr lang="en-US" smtClean="0"/>
-              <a:t>4/10/2026</a:t>
+              <a:t>4/14/2026</a:t>
             </a:fld>
             <a:endParaRPr lang="en-US"/>
           </a:p>
@@ -958,7 +1213,7 @@
           <a:p>
             <a:fld id="{6D56CEC0-DF97-456E-86D8-3A3990EFFFDD}" type="slidenum">
               <a:rPr lang="en-US" smtClean="0"/>
-              <a:t>6</a:t>
+              <a:t>7</a:t>
             </a:fld>
             <a:endParaRPr lang="en-US"/>
           </a:p>
@@ -1145,7 +1400,7 @@
           <a:p>
             <a:fld id="{DC00B611-A437-4A1C-AF17-82A64D909590}" type="datetimeFigureOut">
               <a:rPr lang="en-US" smtClean="0"/>
-              <a:t>4/10/2026</a:t>
+              <a:t>4/14/2026</a:t>
             </a:fld>
             <a:endParaRPr lang="en-US"/>
           </a:p>
@@ -1380,7 +1635,7 @@
           <a:p>
             <a:fld id="{DC00B611-A437-4A1C-AF17-82A64D909590}" type="datetimeFigureOut">
               <a:rPr lang="en-US" smtClean="0"/>
-              <a:t>4/10/2026</a:t>
+              <a:t>4/14/2026</a:t>
             </a:fld>
             <a:endParaRPr lang="en-US"/>
           </a:p>
@@ -1560,7 +1815,7 @@
           <a:p>
             <a:fld id="{DC00B611-A437-4A1C-AF17-82A64D909590}" type="datetimeFigureOut">
               <a:rPr lang="en-US" smtClean="0"/>
-              <a:t>4/10/2026</a:t>
+              <a:t>4/14/2026</a:t>
             </a:fld>
             <a:endParaRPr lang="en-US"/>
           </a:p>
@@ -1730,7 +1985,7 @@
           <a:p>
             <a:fld id="{DC00B611-A437-4A1C-AF17-82A64D909590}" type="datetimeFigureOut">
               <a:rPr lang="en-US" smtClean="0"/>
-              <a:t>4/10/2026</a:t>
+              <a:t>4/14/2026</a:t>
             </a:fld>
             <a:endParaRPr lang="en-US"/>
           </a:p>
@@ -1984,7 +2239,7 @@
           <a:p>
             <a:fld id="{DC00B611-A437-4A1C-AF17-82A64D909590}" type="datetimeFigureOut">
               <a:rPr lang="en-US" smtClean="0"/>
-              <a:t>4/10/2026</a:t>
+              <a:t>4/14/2026</a:t>
             </a:fld>
             <a:endParaRPr lang="en-US"/>
           </a:p>
@@ -2310,7 +2565,7 @@
           <a:p>
             <a:fld id="{DC00B611-A437-4A1C-AF17-82A64D909590}" type="datetimeFigureOut">
               <a:rPr lang="en-US" smtClean="0"/>
-              <a:t>4/10/2026</a:t>
+              <a:t>4/14/2026</a:t>
             </a:fld>
             <a:endParaRPr lang="en-US"/>
           </a:p>
@@ -2761,7 +3016,7 @@
           <a:p>
             <a:fld id="{DC00B611-A437-4A1C-AF17-82A64D909590}" type="datetimeFigureOut">
               <a:rPr lang="en-US" smtClean="0"/>
-              <a:t>4/10/2026</a:t>
+              <a:t>4/14/2026</a:t>
             </a:fld>
             <a:endParaRPr lang="en-US"/>
           </a:p>
@@ -2879,7 +3134,7 @@
           <a:p>
             <a:fld id="{DC00B611-A437-4A1C-AF17-82A64D909590}" type="datetimeFigureOut">
               <a:rPr lang="en-US" smtClean="0"/>
-              <a:t>4/10/2026</a:t>
+              <a:t>4/14/2026</a:t>
             </a:fld>
             <a:endParaRPr lang="en-US"/>
           </a:p>
@@ -2974,7 +3229,7 @@
           <a:p>
             <a:fld id="{DC00B611-A437-4A1C-AF17-82A64D909590}" type="datetimeFigureOut">
               <a:rPr lang="en-US" smtClean="0"/>
-              <a:t>4/10/2026</a:t>
+              <a:t>4/14/2026</a:t>
             </a:fld>
             <a:endParaRPr lang="en-US"/>
           </a:p>
@@ -3261,7 +3516,7 @@
           <a:p>
             <a:fld id="{DC00B611-A437-4A1C-AF17-82A64D909590}" type="datetimeFigureOut">
               <a:rPr lang="en-US" smtClean="0"/>
-              <a:t>4/10/2026</a:t>
+              <a:t>4/14/2026</a:t>
             </a:fld>
             <a:endParaRPr lang="en-US"/>
           </a:p>
@@ -3583,7 +3838,7 @@
           <a:p>
             <a:fld id="{DC00B611-A437-4A1C-AF17-82A64D909590}" type="datetimeFigureOut">
               <a:rPr lang="en-US" smtClean="0"/>
-              <a:t>4/10/2026</a:t>
+              <a:t>4/14/2026</a:t>
             </a:fld>
             <a:endParaRPr lang="en-US"/>
           </a:p>
@@ -3844,7 +4099,7 @@
           <a:p>
             <a:fld id="{DC00B611-A437-4A1C-AF17-82A64D909590}" type="datetimeFigureOut">
               <a:rPr lang="en-US" smtClean="0"/>
-              <a:t>4/10/2026</a:t>
+              <a:t>4/14/2026</a:t>
             </a:fld>
             <a:endParaRPr lang="en-US"/>
           </a:p>
@@ -4435,7 +4690,7 @@
           <p:cNvPr id="2" name="Title 1">
             <a:extLst>
               <a:ext uri="{FF2B5EF4-FFF2-40B4-BE49-F238E27FC236}">
-                <a16:creationId xmlns:a16="http://schemas.microsoft.com/office/drawing/2014/main" id="{EA50F1C3-D4AD-44BC-9D19-0B8822C52BE3}"/>
+                <a16:creationId xmlns:a16="http://schemas.microsoft.com/office/drawing/2014/main" id="{F3053089-2FE7-949B-3A32-64DE992CDD08}"/>
               </a:ext>
             </a:extLst>
           </p:cNvPr>
@@ -4453,25 +4708,17 @@
           <a:p>
             <a:r>
               <a:rPr lang="en-US" dirty="0"/>
-              <a:t>Using </a:t>
-            </a:r>
-            <a:r>
-              <a:rPr lang="en-US" dirty="0" err="1"/>
-              <a:t>Jupyter</a:t>
-            </a:r>
-            <a:r>
-              <a:rPr lang="en-US" dirty="0"/>
-              <a:t> Notebook</a:t>
-            </a:r>
-          </a:p>
-        </p:txBody>
-      </p:sp>
-      <p:sp>
-        <p:nvSpPr>
-          <p:cNvPr id="3" name="Content Placeholder 2">
+              <a:t>Development Environments/Software</a:t>
+            </a:r>
+          </a:p>
+        </p:txBody>
+      </p:sp>
+      <p:sp>
+        <p:nvSpPr>
+          <p:cNvPr id="3" name="Text Placeholder 2">
             <a:extLst>
               <a:ext uri="{FF2B5EF4-FFF2-40B4-BE49-F238E27FC236}">
-                <a16:creationId xmlns:a16="http://schemas.microsoft.com/office/drawing/2014/main" id="{449EF9F9-FC01-23AF-11E6-F08E45971911}"/>
+                <a16:creationId xmlns:a16="http://schemas.microsoft.com/office/drawing/2014/main" id="{1FA718D2-1515-4F60-5337-F48BE5CA15DD}"/>
               </a:ext>
             </a:extLst>
           </p:cNvPr>
@@ -4479,7 +4726,7 @@
             <a:spLocks noGrp="1"/>
           </p:cNvSpPr>
           <p:nvPr>
-            <p:ph idx="1"/>
+            <p:ph type="body" idx="1"/>
           </p:nvPr>
         </p:nvSpPr>
         <p:spPr/>
@@ -4487,30 +4734,6 @@
           <a:bodyPr/>
           <a:lstStyle/>
           <a:p>
-            <a:r>
-              <a:rPr lang="en-US" dirty="0"/>
-              <a:t>Install using command line</a:t>
-            </a:r>
-          </a:p>
-          <a:p>
-            <a:pPr lvl="1"/>
-            <a:r>
-              <a:rPr lang="en-US" dirty="0"/>
-              <a:t>pip install notebook</a:t>
-            </a:r>
-          </a:p>
-          <a:p>
-            <a:pPr lvl="1"/>
-            <a:r>
-              <a:rPr lang="en-US" dirty="0"/>
-              <a:t>Other instructions: https://jupyter.org/</a:t>
-            </a:r>
-          </a:p>
-          <a:p>
-            <a:r>
-              <a:rPr lang="en-US" dirty="0"/>
-              <a:t>Run </a:t>
-            </a:r>
             <a:r>
               <a:rPr lang="en-US" dirty="0" err="1"/>
               <a:t>Jupyter</a:t>
@@ -4520,67 +4743,144 @@
               <a:t> Notebook</a:t>
             </a:r>
           </a:p>
-          <a:p>
-            <a:pPr lvl="1"/>
-            <a:r>
-              <a:rPr lang="en-US" dirty="0"/>
-              <a:t>Open a folder</a:t>
-            </a:r>
-          </a:p>
-          <a:p>
-            <a:pPr lvl="1"/>
-            <a:r>
-              <a:rPr lang="en-US" dirty="0"/>
-              <a:t>In the directory/navigation bar type </a:t>
-            </a:r>
-            <a:r>
-              <a:rPr lang="en-US" dirty="0" err="1"/>
-              <a:t>cmd</a:t>
-            </a:r>
-            <a:endParaRPr lang="en-US" dirty="0"/>
-          </a:p>
-          <a:p>
-            <a:pPr lvl="1"/>
-            <a:r>
-              <a:rPr lang="en-US" dirty="0"/>
-              <a:t>Type python –m notebook</a:t>
-            </a:r>
-          </a:p>
-          <a:p>
-            <a:r>
-              <a:rPr lang="en-US" dirty="0"/>
-              <a:t>Run Kernel</a:t>
-            </a:r>
-          </a:p>
-          <a:p>
-            <a:pPr lvl="1"/>
-            <a:r>
-              <a:rPr lang="en-US" dirty="0"/>
-              <a:t>On the right hand side select New &gt;&gt; Python &lt;version&gt; </a:t>
-            </a:r>
-            <a:r>
-              <a:rPr lang="en-US" dirty="0" err="1"/>
-              <a:t>ipykernel</a:t>
-            </a:r>
-            <a:endParaRPr lang="en-US" dirty="0"/>
-          </a:p>
-          <a:p>
-            <a:pPr lvl="1"/>
-            <a:r>
-              <a:rPr lang="en-US" dirty="0"/>
-              <a:t>This will open a new tab and you can begin to write code</a:t>
-            </a:r>
-          </a:p>
-          <a:p>
-            <a:pPr lvl="1"/>
-            <a:endParaRPr lang="en-US" dirty="0"/>
+        </p:txBody>
+      </p:sp>
+      <p:sp>
+        <p:nvSpPr>
+          <p:cNvPr id="4" name="Content Placeholder 3">
+            <a:extLst>
+              <a:ext uri="{FF2B5EF4-FFF2-40B4-BE49-F238E27FC236}">
+                <a16:creationId xmlns:a16="http://schemas.microsoft.com/office/drawing/2014/main" id="{4085C49C-C004-108F-7C7B-D5B1192D78E6}"/>
+              </a:ext>
+            </a:extLst>
+          </p:cNvPr>
+          <p:cNvSpPr>
+            <a:spLocks noGrp="1"/>
+          </p:cNvSpPr>
+          <p:nvPr>
+            <p:ph sz="half" idx="2"/>
+          </p:nvPr>
+        </p:nvSpPr>
+        <p:spPr/>
+        <p:txBody>
+          <a:bodyPr/>
+          <a:lstStyle/>
+          <a:p>
+            <a:r>
+              <a:rPr lang="en-US" dirty="0"/>
+              <a:t>Similar style to SAS, or R Studio</a:t>
+            </a:r>
+          </a:p>
+          <a:p>
+            <a:r>
+              <a:rPr lang="en-US" dirty="0"/>
+              <a:t>Everything will be generated in one window.</a:t>
+            </a:r>
+          </a:p>
+          <a:p>
+            <a:r>
+              <a:rPr lang="en-US" dirty="0"/>
+              <a:t>Run and execute individual lines</a:t>
+            </a:r>
+          </a:p>
+          <a:p>
+            <a:r>
+              <a:rPr lang="en-US" dirty="0"/>
+              <a:t>Be careful of virtual environments</a:t>
+            </a:r>
+          </a:p>
+          <a:p>
+            <a:r>
+              <a:rPr lang="en-US" dirty="0"/>
+              <a:t>Difficult to create and manage large code base/modules</a:t>
+            </a:r>
+          </a:p>
+        </p:txBody>
+      </p:sp>
+      <p:sp>
+        <p:nvSpPr>
+          <p:cNvPr id="5" name="Text Placeholder 4">
+            <a:extLst>
+              <a:ext uri="{FF2B5EF4-FFF2-40B4-BE49-F238E27FC236}">
+                <a16:creationId xmlns:a16="http://schemas.microsoft.com/office/drawing/2014/main" id="{3BAA9CEA-E969-942C-87D0-ED405D6D7B77}"/>
+              </a:ext>
+            </a:extLst>
+          </p:cNvPr>
+          <p:cNvSpPr>
+            <a:spLocks noGrp="1"/>
+          </p:cNvSpPr>
+          <p:nvPr>
+            <p:ph type="body" sz="quarter" idx="3"/>
+          </p:nvPr>
+        </p:nvSpPr>
+        <p:spPr/>
+        <p:txBody>
+          <a:bodyPr/>
+          <a:lstStyle/>
+          <a:p>
+            <a:r>
+              <a:rPr lang="en-US" dirty="0"/>
+              <a:t>Code Editors (VS Code, or others)</a:t>
+            </a:r>
+          </a:p>
+        </p:txBody>
+      </p:sp>
+      <p:sp>
+        <p:nvSpPr>
+          <p:cNvPr id="6" name="Content Placeholder 5">
+            <a:extLst>
+              <a:ext uri="{FF2B5EF4-FFF2-40B4-BE49-F238E27FC236}">
+                <a16:creationId xmlns:a16="http://schemas.microsoft.com/office/drawing/2014/main" id="{7F2D1287-D343-C6D7-45D4-EB38928111A1}"/>
+              </a:ext>
+            </a:extLst>
+          </p:cNvPr>
+          <p:cNvSpPr>
+            <a:spLocks noGrp="1"/>
+          </p:cNvSpPr>
+          <p:nvPr>
+            <p:ph sz="quarter" idx="4"/>
+          </p:nvPr>
+        </p:nvSpPr>
+        <p:spPr/>
+        <p:txBody>
+          <a:bodyPr/>
+          <a:lstStyle/>
+          <a:p>
+            <a:r>
+              <a:rPr lang="en-US" dirty="0"/>
+              <a:t>Highly customizable</a:t>
+            </a:r>
+          </a:p>
+          <a:p>
+            <a:r>
+              <a:rPr lang="en-US" dirty="0"/>
+              <a:t>Extra extensions may need installed</a:t>
+            </a:r>
+          </a:p>
+          <a:p>
+            <a:r>
+              <a:rPr lang="en-US" dirty="0"/>
+              <a:t>Learn the editor</a:t>
+            </a:r>
+          </a:p>
+          <a:p>
+            <a:r>
+              <a:rPr lang="en-US" dirty="0"/>
+              <a:t>More difficult to run single lines of code</a:t>
+            </a:r>
+          </a:p>
+          <a:p>
+            <a:r>
+              <a:rPr lang="en-US" dirty="0"/>
+              <a:t>Easier to maintain and edit large code bases or multiple files.</a:t>
+            </a:r>
           </a:p>
         </p:txBody>
       </p:sp>
     </p:spTree>
     <p:extLst>
       <p:ext uri="{BB962C8B-B14F-4D97-AF65-F5344CB8AC3E}">
-        <p14:creationId xmlns:p14="http://schemas.microsoft.com/office/powerpoint/2010/main" val="796140452"/>
+        <p14:creationId xmlns:p14="http://schemas.microsoft.com/office/powerpoint/2010/main" val="1383140307"/>
       </p:ext>
     </p:extLst>
   </p:cSld>
@@ -4612,7 +4912,7 @@
           <p:cNvPr id="2" name="Title 1">
             <a:extLst>
               <a:ext uri="{FF2B5EF4-FFF2-40B4-BE49-F238E27FC236}">
-                <a16:creationId xmlns:a16="http://schemas.microsoft.com/office/drawing/2014/main" id="{6DC749C4-0EB5-55A9-5F7F-4077AE7F92E2}"/>
+                <a16:creationId xmlns:a16="http://schemas.microsoft.com/office/drawing/2014/main" id="{EA50F1C3-D4AD-44BC-9D19-0B8822C52BE3}"/>
               </a:ext>
             </a:extLst>
           </p:cNvPr>
@@ -4630,7 +4930,15 @@
           <a:p>
             <a:r>
               <a:rPr lang="en-US" dirty="0"/>
-              <a:t>Using VS Code</a:t>
+              <a:t>Using </a:t>
+            </a:r>
+            <a:r>
+              <a:rPr lang="en-US" dirty="0" err="1"/>
+              <a:t>Jupyter</a:t>
+            </a:r>
+            <a:r>
+              <a:rPr lang="en-US" dirty="0"/>
+              <a:t> Notebook</a:t>
             </a:r>
           </a:p>
         </p:txBody>
@@ -4640,7 +4948,7 @@
           <p:cNvPr id="3" name="Content Placeholder 2">
             <a:extLst>
               <a:ext uri="{FF2B5EF4-FFF2-40B4-BE49-F238E27FC236}">
-                <a16:creationId xmlns:a16="http://schemas.microsoft.com/office/drawing/2014/main" id="{955788F8-FD69-DAAC-AEB4-A8DCF13487B3}"/>
+                <a16:creationId xmlns:a16="http://schemas.microsoft.com/office/drawing/2014/main" id="{449EF9F9-FC01-23AF-11E6-F08E45971911}"/>
               </a:ext>
             </a:extLst>
           </p:cNvPr>
@@ -4653,23 +4961,58 @@
         </p:nvSpPr>
         <p:spPr/>
         <p:txBody>
-          <a:bodyPr>
-            <a:normAutofit fontScale="85000" lnSpcReduction="20000"/>
-          </a:bodyPr>
-          <a:lstStyle/>
-          <a:p>
-            <a:r>
-              <a:rPr lang="en-US" dirty="0"/>
-              <a:t>Typical software install:</a:t>
+          <a:bodyPr/>
+          <a:lstStyle/>
+          <a:p>
+            <a:r>
+              <a:rPr lang="en-US" dirty="0"/>
+              <a:t>Install using command line</a:t>
             </a:r>
           </a:p>
           <a:p>
             <a:pPr lvl="1"/>
             <a:r>
-              <a:rPr lang="en-US" dirty="0">
-                <a:hlinkClick r:id="rId2"/>
-              </a:rPr>
-              <a:t>https://code.visualstudio.com/</a:t>
+              <a:rPr lang="en-US" dirty="0"/>
+              <a:t>pip install notebook</a:t>
+            </a:r>
+          </a:p>
+          <a:p>
+            <a:pPr lvl="1"/>
+            <a:r>
+              <a:rPr lang="en-US" dirty="0"/>
+              <a:t>Other instructions: https://jupyter.org/</a:t>
+            </a:r>
+          </a:p>
+          <a:p>
+            <a:r>
+              <a:rPr lang="en-US" dirty="0"/>
+              <a:t>Run </a:t>
+            </a:r>
+            <a:r>
+              <a:rPr lang="en-US" dirty="0" err="1"/>
+              <a:t>Jupyter</a:t>
+            </a:r>
+            <a:r>
+              <a:rPr lang="en-US" dirty="0"/>
+              <a:t> Notebook</a:t>
+            </a:r>
+          </a:p>
+          <a:p>
+            <a:pPr lvl="1"/>
+            <a:r>
+              <a:rPr lang="en-US" dirty="0"/>
+              <a:t>Open a folder</a:t>
+            </a:r>
+          </a:p>
+          <a:p>
+            <a:pPr lvl="1"/>
+            <a:r>
+              <a:rPr lang="en-US" dirty="0"/>
+              <a:t>In the directory/navigation bar type </a:t>
+            </a:r>
+            <a:r>
+              <a:rPr lang="en-US" dirty="0" err="1"/>
+              <a:t>cmd</a:t>
             </a:r>
             <a:endParaRPr lang="en-US" dirty="0"/>
           </a:p>
@@ -4677,114 +5020,46 @@
             <a:pPr lvl="1"/>
             <a:r>
               <a:rPr lang="en-US" dirty="0"/>
-              <a:t>May need temporary admin rights</a:t>
-            </a:r>
-          </a:p>
-          <a:p>
-            <a:r>
-              <a:rPr lang="en-US" dirty="0"/>
-              <a:t>Open VS Code</a:t>
-            </a:r>
-          </a:p>
-          <a:p>
-            <a:r>
-              <a:rPr lang="en-US" dirty="0"/>
-              <a:t>Select File and Open folder, navigate to your working directory</a:t>
-            </a:r>
-          </a:p>
-          <a:p>
-            <a:r>
-              <a:rPr lang="en-US" dirty="0"/>
-              <a:t>Install extensions:</a:t>
+              <a:t>Type python –m notebook</a:t>
+            </a:r>
+          </a:p>
+          <a:p>
+            <a:r>
+              <a:rPr lang="en-US" dirty="0"/>
+              <a:t>Run Kernel</a:t>
             </a:r>
           </a:p>
           <a:p>
             <a:pPr lvl="1"/>
             <a:r>
               <a:rPr lang="en-US" dirty="0"/>
-              <a:t>Left hand side select Extensions</a:t>
-            </a:r>
+              <a:t>On the right hand side select New &gt;&gt; Python &lt;version&gt; </a:t>
+            </a:r>
+            <a:r>
+              <a:rPr lang="en-US" dirty="0" err="1"/>
+              <a:t>ipykernel</a:t>
+            </a:r>
+            <a:endParaRPr lang="en-US" dirty="0"/>
           </a:p>
           <a:p>
             <a:pPr lvl="1"/>
             <a:r>
               <a:rPr lang="en-US" dirty="0"/>
-              <a:t>Search Python</a:t>
+              <a:t>This will open a new tab and you can begin to write code</a:t>
             </a:r>
           </a:p>
           <a:p>
             <a:pPr lvl="1"/>
-            <a:r>
-              <a:rPr lang="en-US" dirty="0"/>
-              <a:t>Install Python Extension Pack</a:t>
-            </a:r>
-          </a:p>
-          <a:p>
-            <a:r>
-              <a:rPr lang="en-US" dirty="0"/>
-              <a:t>Create a &lt;name&gt;.</a:t>
-            </a:r>
-            <a:r>
-              <a:rPr lang="en-US" dirty="0" err="1"/>
-              <a:t>py</a:t>
-            </a:r>
-            <a:r>
-              <a:rPr lang="en-US" dirty="0"/>
-              <a:t> file</a:t>
-            </a:r>
-          </a:p>
-          <a:p>
-            <a:r>
-              <a:rPr lang="en-US" dirty="0"/>
-              <a:t>Enter Code and run by:</a:t>
+            <a:endParaRPr lang="en-US" dirty="0"/>
+          </a:p>
+          <a:p>
+            <a:r>
+              <a:rPr lang="en-US" dirty="0"/>
+              <a:t>Be careful of installing and running in a Virtual Environment</a:t>
             </a:r>
           </a:p>
           <a:p>
             <a:pPr lvl="1"/>
-            <a:r>
-              <a:rPr lang="en-US" dirty="0"/>
-              <a:t>Clicking Run Python File in upper right corner</a:t>
-            </a:r>
-          </a:p>
-          <a:p>
-            <a:pPr lvl="1"/>
-            <a:r>
-              <a:rPr lang="en-US" dirty="0"/>
-              <a:t>Select Run &gt;&gt; Start Debugging &gt;&gt; Python Debugger &gt;&gt; Python File</a:t>
-            </a:r>
-          </a:p>
-          <a:p>
-            <a:pPr lvl="2"/>
-            <a:r>
-              <a:rPr lang="en-US" dirty="0"/>
-              <a:t>You can also create a launch </a:t>
-            </a:r>
-            <a:r>
-              <a:rPr lang="en-US" dirty="0" err="1"/>
-              <a:t>json</a:t>
-            </a:r>
-            <a:r>
-              <a:rPr lang="en-US" dirty="0"/>
-              <a:t> to skip past debug instructions each run</a:t>
-            </a:r>
-          </a:p>
-          <a:p>
-            <a:pPr lvl="1"/>
-            <a:r>
-              <a:rPr lang="en-US" dirty="0"/>
-              <a:t>In the bottom terminal window type:</a:t>
-            </a:r>
-          </a:p>
-          <a:p>
-            <a:pPr lvl="2"/>
-            <a:r>
-              <a:rPr lang="en-US" dirty="0"/>
-              <a:t>python &lt;name&gt;.</a:t>
-            </a:r>
-            <a:r>
-              <a:rPr lang="en-US" dirty="0" err="1"/>
-              <a:t>py</a:t>
-            </a:r>
             <a:endParaRPr lang="en-US" dirty="0"/>
           </a:p>
         </p:txBody>
@@ -4792,7 +5067,7 @@
     </p:spTree>
     <p:extLst>
       <p:ext uri="{BB962C8B-B14F-4D97-AF65-F5344CB8AC3E}">
-        <p14:creationId xmlns:p14="http://schemas.microsoft.com/office/powerpoint/2010/main" val="1247533024"/>
+        <p14:creationId xmlns:p14="http://schemas.microsoft.com/office/powerpoint/2010/main" val="796140452"/>
       </p:ext>
     </p:extLst>
   </p:cSld>
@@ -4819,153 +5094,70 @@
           <a:chExt cx="0" cy="0"/>
         </a:xfrm>
       </p:grpSpPr>
-      <p:sp>
-        <p:nvSpPr>
-          <p:cNvPr id="2" name="Title 1">
+      <p:pic>
+        <p:nvPicPr>
+          <p:cNvPr id="3" name="Picture 2">
             <a:extLst>
               <a:ext uri="{FF2B5EF4-FFF2-40B4-BE49-F238E27FC236}">
-                <a16:creationId xmlns:a16="http://schemas.microsoft.com/office/drawing/2014/main" id="{A2BFE9D6-61E9-9967-3788-9DD994259A69}"/>
+                <a16:creationId xmlns:a16="http://schemas.microsoft.com/office/drawing/2014/main" id="{EE4175D9-873C-E8A9-7791-B8E1938576D7}"/>
               </a:ext>
             </a:extLst>
           </p:cNvPr>
-          <p:cNvSpPr>
-            <a:spLocks noGrp="1"/>
-          </p:cNvSpPr>
-          <p:nvPr>
-            <p:ph type="title"/>
-          </p:nvPr>
-        </p:nvSpPr>
-        <p:spPr/>
-        <p:txBody>
-          <a:bodyPr/>
-          <a:lstStyle/>
-          <a:p>
-            <a:r>
-              <a:rPr lang="en-US" dirty="0"/>
-              <a:t>Installing Modules</a:t>
-            </a:r>
-          </a:p>
-        </p:txBody>
-      </p:sp>
-      <p:sp>
-        <p:nvSpPr>
-          <p:cNvPr id="3" name="Content Placeholder 2">
+          <p:cNvPicPr>
+            <a:picLocks noChangeAspect="1"/>
+          </p:cNvPicPr>
+          <p:nvPr/>
+        </p:nvPicPr>
+        <p:blipFill>
+          <a:blip r:embed="rId2"/>
+          <a:stretch>
+            <a:fillRect/>
+          </a:stretch>
+        </p:blipFill>
+        <p:spPr>
+          <a:xfrm>
+            <a:off x="0" y="0"/>
+            <a:ext cx="5379147" cy="3032539"/>
+          </a:xfrm>
+          <a:prstGeom prst="rect">
+            <a:avLst/>
+          </a:prstGeom>
+        </p:spPr>
+      </p:pic>
+      <p:pic>
+        <p:nvPicPr>
+          <p:cNvPr id="5" name="Picture 4">
             <a:extLst>
               <a:ext uri="{FF2B5EF4-FFF2-40B4-BE49-F238E27FC236}">
-                <a16:creationId xmlns:a16="http://schemas.microsoft.com/office/drawing/2014/main" id="{95A6A236-BEC2-240B-1A7C-75889931A5F6}"/>
+                <a16:creationId xmlns:a16="http://schemas.microsoft.com/office/drawing/2014/main" id="{B4EB7A16-FD41-07CD-827F-D608ED12E7F0}"/>
               </a:ext>
             </a:extLst>
           </p:cNvPr>
-          <p:cNvSpPr>
-            <a:spLocks noGrp="1"/>
-          </p:cNvSpPr>
-          <p:nvPr>
-            <p:ph idx="1"/>
-          </p:nvPr>
-        </p:nvSpPr>
-        <p:spPr/>
-        <p:txBody>
-          <a:bodyPr>
-            <a:normAutofit/>
-          </a:bodyPr>
-          <a:lstStyle/>
-          <a:p>
-            <a:r>
-              <a:rPr lang="en-US" dirty="0"/>
-              <a:t>Most modules use pip to install:</a:t>
-            </a:r>
-          </a:p>
-          <a:p>
-            <a:pPr lvl="1"/>
-            <a:r>
-              <a:rPr lang="en-US" dirty="0"/>
-              <a:t>pip install pandas</a:t>
-            </a:r>
-          </a:p>
-          <a:p>
-            <a:pPr lvl="1"/>
-            <a:r>
-              <a:rPr lang="en-US" dirty="0"/>
-              <a:t>pip install pandas matplotlib scikit-learn</a:t>
-            </a:r>
-          </a:p>
-          <a:p>
-            <a:r>
-              <a:rPr lang="en-US" dirty="0"/>
-              <a:t>Popular modules:</a:t>
-            </a:r>
-          </a:p>
-          <a:p>
-            <a:pPr lvl="1"/>
-            <a:r>
-              <a:rPr lang="en-US" dirty="0"/>
-              <a:t>Pandas – Data Analysis/Tabular data</a:t>
-            </a:r>
-          </a:p>
-          <a:p>
-            <a:pPr lvl="1"/>
-            <a:r>
-              <a:rPr lang="en-US" dirty="0" err="1"/>
-              <a:t>Numpy</a:t>
-            </a:r>
-            <a:r>
-              <a:rPr lang="en-US" dirty="0"/>
-              <a:t> – Scientific computing, arrays, matrices (included with pandas install)</a:t>
-            </a:r>
-          </a:p>
-          <a:p>
-            <a:pPr lvl="1"/>
-            <a:r>
-              <a:rPr lang="en-US" dirty="0"/>
-              <a:t>Matplotlib, Seaborn – Charts and graphs</a:t>
-            </a:r>
-          </a:p>
-          <a:p>
-            <a:pPr lvl="1"/>
-            <a:r>
-              <a:rPr lang="en-US" dirty="0"/>
-              <a:t>Scikit Learn, Tensor Flow – Machine Learning/Modelling</a:t>
-            </a:r>
-          </a:p>
-          <a:p>
-            <a:pPr lvl="1"/>
-            <a:r>
-              <a:rPr lang="en-US" dirty="0"/>
-              <a:t>Beautiful Soup – Web Scraping</a:t>
-            </a:r>
-          </a:p>
-          <a:p>
-            <a:pPr lvl="1"/>
-            <a:r>
-              <a:rPr lang="en-US" dirty="0" err="1"/>
-              <a:t>Openpyxl</a:t>
-            </a:r>
-            <a:r>
-              <a:rPr lang="en-US" dirty="0"/>
-              <a:t>, </a:t>
-            </a:r>
-            <a:r>
-              <a:rPr lang="en-US" dirty="0" err="1"/>
-              <a:t>Xlsxwriter</a:t>
-            </a:r>
-            <a:r>
-              <a:rPr lang="en-US" dirty="0"/>
-              <a:t> – creating and modifying Excel spreadsheets</a:t>
-            </a:r>
-          </a:p>
-          <a:p>
-            <a:pPr lvl="1"/>
-            <a:r>
-              <a:rPr lang="en-US" dirty="0"/>
-              <a:t>Multiple database connection modules</a:t>
-            </a:r>
-          </a:p>
-        </p:txBody>
-      </p:sp>
+          <p:cNvPicPr>
+            <a:picLocks noChangeAspect="1"/>
+          </p:cNvPicPr>
+          <p:nvPr/>
+        </p:nvPicPr>
+        <p:blipFill>
+          <a:blip r:embed="rId3"/>
+          <a:stretch>
+            <a:fillRect/>
+          </a:stretch>
+        </p:blipFill>
+        <p:spPr>
+          <a:xfrm>
+            <a:off x="4859407" y="3116826"/>
+            <a:ext cx="6251024" cy="3495017"/>
+          </a:xfrm>
+          <a:prstGeom prst="rect">
+            <a:avLst/>
+          </a:prstGeom>
+        </p:spPr>
+      </p:pic>
     </p:spTree>
     <p:extLst>
       <p:ext uri="{BB962C8B-B14F-4D97-AF65-F5344CB8AC3E}">
-        <p14:creationId xmlns:p14="http://schemas.microsoft.com/office/powerpoint/2010/main" val="2491955574"/>
+        <p14:creationId xmlns:p14="http://schemas.microsoft.com/office/powerpoint/2010/main" val="3772174815"/>
       </p:ext>
     </p:extLst>
   </p:cSld>
@@ -4992,6 +5184,1347 @@
           <a:chExt cx="0" cy="0"/>
         </a:xfrm>
       </p:grpSpPr>
+      <p:pic>
+        <p:nvPicPr>
+          <p:cNvPr id="3" name="Picture 2">
+            <a:extLst>
+              <a:ext uri="{FF2B5EF4-FFF2-40B4-BE49-F238E27FC236}">
+                <a16:creationId xmlns:a16="http://schemas.microsoft.com/office/drawing/2014/main" id="{84ECC3FB-5F8C-CFC3-2032-6850545E8928}"/>
+              </a:ext>
+            </a:extLst>
+          </p:cNvPr>
+          <p:cNvPicPr>
+            <a:picLocks noChangeAspect="1"/>
+          </p:cNvPicPr>
+          <p:nvPr/>
+        </p:nvPicPr>
+        <p:blipFill>
+          <a:blip r:embed="rId2"/>
+          <a:stretch>
+            <a:fillRect/>
+          </a:stretch>
+        </p:blipFill>
+        <p:spPr>
+          <a:xfrm>
+            <a:off x="1257300" y="0"/>
+            <a:ext cx="8686800" cy="2838757"/>
+          </a:xfrm>
+          <a:prstGeom prst="rect">
+            <a:avLst/>
+          </a:prstGeom>
+        </p:spPr>
+      </p:pic>
+      <p:pic>
+        <p:nvPicPr>
+          <p:cNvPr id="5" name="Picture 4">
+            <a:extLst>
+              <a:ext uri="{FF2B5EF4-FFF2-40B4-BE49-F238E27FC236}">
+                <a16:creationId xmlns:a16="http://schemas.microsoft.com/office/drawing/2014/main" id="{2F80A413-BB58-94DE-2B3F-946A3FA5C8BE}"/>
+              </a:ext>
+            </a:extLst>
+          </p:cNvPr>
+          <p:cNvPicPr>
+            <a:picLocks noChangeAspect="1"/>
+          </p:cNvPicPr>
+          <p:nvPr/>
+        </p:nvPicPr>
+        <p:blipFill>
+          <a:blip r:embed="rId3"/>
+          <a:stretch>
+            <a:fillRect/>
+          </a:stretch>
+        </p:blipFill>
+        <p:spPr>
+          <a:xfrm>
+            <a:off x="919595" y="3348597"/>
+            <a:ext cx="9362209" cy="2821702"/>
+          </a:xfrm>
+          <a:prstGeom prst="rect">
+            <a:avLst/>
+          </a:prstGeom>
+        </p:spPr>
+      </p:pic>
+      <p:sp>
+        <p:nvSpPr>
+          <p:cNvPr id="6" name="Rectangle 5">
+            <a:extLst>
+              <a:ext uri="{FF2B5EF4-FFF2-40B4-BE49-F238E27FC236}">
+                <a16:creationId xmlns:a16="http://schemas.microsoft.com/office/drawing/2014/main" id="{218091C4-BF42-2066-FF60-FD5DB8206FC4}"/>
+              </a:ext>
+            </a:extLst>
+          </p:cNvPr>
+          <p:cNvSpPr/>
+          <p:nvPr/>
+        </p:nvSpPr>
+        <p:spPr>
+          <a:xfrm>
+            <a:off x="7975600" y="906207"/>
+            <a:ext cx="440813" cy="263832"/>
+          </a:xfrm>
+          <a:prstGeom prst="rect">
+            <a:avLst/>
+          </a:prstGeom>
+          <a:noFill/>
+          <a:ln w="38100">
+            <a:solidFill>
+              <a:srgbClr val="FF0000"/>
+            </a:solidFill>
+          </a:ln>
+        </p:spPr>
+        <p:style>
+          <a:lnRef idx="2">
+            <a:schemeClr val="accent1">
+              <a:shade val="15000"/>
+            </a:schemeClr>
+          </a:lnRef>
+          <a:fillRef idx="1">
+            <a:schemeClr val="accent1"/>
+          </a:fillRef>
+          <a:effectRef idx="0">
+            <a:schemeClr val="accent1"/>
+          </a:effectRef>
+          <a:fontRef idx="minor">
+            <a:schemeClr val="lt1"/>
+          </a:fontRef>
+        </p:style>
+        <p:txBody>
+          <a:bodyPr rtlCol="0" anchor="ctr"/>
+          <a:lstStyle/>
+          <a:p>
+            <a:pPr algn="ctr"/>
+            <a:endParaRPr lang="en-US"/>
+          </a:p>
+        </p:txBody>
+      </p:sp>
+      <p:sp>
+        <p:nvSpPr>
+          <p:cNvPr id="7" name="Rectangle 6">
+            <a:extLst>
+              <a:ext uri="{FF2B5EF4-FFF2-40B4-BE49-F238E27FC236}">
+                <a16:creationId xmlns:a16="http://schemas.microsoft.com/office/drawing/2014/main" id="{DB647302-83DD-F215-968C-948E63C4C6F1}"/>
+              </a:ext>
+            </a:extLst>
+          </p:cNvPr>
+          <p:cNvSpPr/>
+          <p:nvPr/>
+        </p:nvSpPr>
+        <p:spPr>
+          <a:xfrm>
+            <a:off x="7454950" y="4119716"/>
+            <a:ext cx="1041300" cy="263525"/>
+          </a:xfrm>
+          <a:prstGeom prst="rect">
+            <a:avLst/>
+          </a:prstGeom>
+          <a:noFill/>
+          <a:ln w="38100">
+            <a:solidFill>
+              <a:srgbClr val="FF0000"/>
+            </a:solidFill>
+          </a:ln>
+        </p:spPr>
+        <p:style>
+          <a:lnRef idx="2">
+            <a:schemeClr val="accent1">
+              <a:shade val="15000"/>
+            </a:schemeClr>
+          </a:lnRef>
+          <a:fillRef idx="1">
+            <a:schemeClr val="accent1"/>
+          </a:fillRef>
+          <a:effectRef idx="0">
+            <a:schemeClr val="accent1"/>
+          </a:effectRef>
+          <a:fontRef idx="minor">
+            <a:schemeClr val="lt1"/>
+          </a:fontRef>
+        </p:style>
+        <p:txBody>
+          <a:bodyPr rtlCol="0" anchor="ctr"/>
+          <a:lstStyle/>
+          <a:p>
+            <a:pPr algn="ctr"/>
+            <a:endParaRPr lang="en-US"/>
+          </a:p>
+        </p:txBody>
+      </p:sp>
+    </p:spTree>
+    <p:extLst>
+      <p:ext uri="{BB962C8B-B14F-4D97-AF65-F5344CB8AC3E}">
+        <p14:creationId xmlns:p14="http://schemas.microsoft.com/office/powerpoint/2010/main" val="2735913048"/>
+      </p:ext>
+    </p:extLst>
+  </p:cSld>
+  <p:clrMapOvr>
+    <a:masterClrMapping/>
+  </p:clrMapOvr>
+</p:sld>
+</file>
+
+<file path=ppt/slides/slide14.xml><?xml version="1.0" encoding="utf-8"?>
+<p:sld xmlns:a="http://schemas.openxmlformats.org/drawingml/2006/main" xmlns:r="http://schemas.openxmlformats.org/officeDocument/2006/relationships" xmlns:p="http://schemas.openxmlformats.org/presentationml/2006/main">
+  <p:cSld>
+    <p:spTree>
+      <p:nvGrpSpPr>
+        <p:cNvPr id="1" name=""/>
+        <p:cNvGrpSpPr/>
+        <p:nvPr/>
+      </p:nvGrpSpPr>
+      <p:grpSpPr>
+        <a:xfrm>
+          <a:off x="0" y="0"/>
+          <a:ext cx="0" cy="0"/>
+          <a:chOff x="0" y="0"/>
+          <a:chExt cx="0" cy="0"/>
+        </a:xfrm>
+      </p:grpSpPr>
+      <p:sp>
+        <p:nvSpPr>
+          <p:cNvPr id="2" name="Title 1">
+            <a:extLst>
+              <a:ext uri="{FF2B5EF4-FFF2-40B4-BE49-F238E27FC236}">
+                <a16:creationId xmlns:a16="http://schemas.microsoft.com/office/drawing/2014/main" id="{6DC749C4-0EB5-55A9-5F7F-4077AE7F92E2}"/>
+              </a:ext>
+            </a:extLst>
+          </p:cNvPr>
+          <p:cNvSpPr>
+            <a:spLocks noGrp="1"/>
+          </p:cNvSpPr>
+          <p:nvPr>
+            <p:ph type="title"/>
+          </p:nvPr>
+        </p:nvSpPr>
+        <p:spPr/>
+        <p:txBody>
+          <a:bodyPr/>
+          <a:lstStyle/>
+          <a:p>
+            <a:r>
+              <a:rPr lang="en-US" dirty="0"/>
+              <a:t>Using VS Code</a:t>
+            </a:r>
+          </a:p>
+        </p:txBody>
+      </p:sp>
+      <p:sp>
+        <p:nvSpPr>
+          <p:cNvPr id="3" name="Content Placeholder 2">
+            <a:extLst>
+              <a:ext uri="{FF2B5EF4-FFF2-40B4-BE49-F238E27FC236}">
+                <a16:creationId xmlns:a16="http://schemas.microsoft.com/office/drawing/2014/main" id="{955788F8-FD69-DAAC-AEB4-A8DCF13487B3}"/>
+              </a:ext>
+            </a:extLst>
+          </p:cNvPr>
+          <p:cNvSpPr>
+            <a:spLocks noGrp="1"/>
+          </p:cNvSpPr>
+          <p:nvPr>
+            <p:ph idx="1"/>
+          </p:nvPr>
+        </p:nvSpPr>
+        <p:spPr/>
+        <p:txBody>
+          <a:bodyPr>
+            <a:normAutofit fontScale="85000" lnSpcReduction="20000"/>
+          </a:bodyPr>
+          <a:lstStyle/>
+          <a:p>
+            <a:r>
+              <a:rPr lang="en-US" dirty="0"/>
+              <a:t>Typical software install:</a:t>
+            </a:r>
+          </a:p>
+          <a:p>
+            <a:pPr lvl="1"/>
+            <a:r>
+              <a:rPr lang="en-US" dirty="0">
+                <a:hlinkClick r:id="rId2"/>
+              </a:rPr>
+              <a:t>https://code.visualstudio.com/</a:t>
+            </a:r>
+            <a:endParaRPr lang="en-US" dirty="0"/>
+          </a:p>
+          <a:p>
+            <a:pPr lvl="1"/>
+            <a:r>
+              <a:rPr lang="en-US" dirty="0"/>
+              <a:t>May need temporary admin rights</a:t>
+            </a:r>
+          </a:p>
+          <a:p>
+            <a:r>
+              <a:rPr lang="en-US" dirty="0"/>
+              <a:t>Open VS Code</a:t>
+            </a:r>
+          </a:p>
+          <a:p>
+            <a:r>
+              <a:rPr lang="en-US" dirty="0"/>
+              <a:t>Select File and Open folder, navigate to your working directory</a:t>
+            </a:r>
+          </a:p>
+          <a:p>
+            <a:r>
+              <a:rPr lang="en-US" dirty="0"/>
+              <a:t>Install extensions:</a:t>
+            </a:r>
+          </a:p>
+          <a:p>
+            <a:pPr lvl="1"/>
+            <a:r>
+              <a:rPr lang="en-US" dirty="0"/>
+              <a:t>Left hand side select Extensions</a:t>
+            </a:r>
+          </a:p>
+          <a:p>
+            <a:pPr lvl="1"/>
+            <a:r>
+              <a:rPr lang="en-US" dirty="0"/>
+              <a:t>Search Python</a:t>
+            </a:r>
+          </a:p>
+          <a:p>
+            <a:pPr lvl="1"/>
+            <a:r>
+              <a:rPr lang="en-US" dirty="0"/>
+              <a:t>Install Python Extension Pack</a:t>
+            </a:r>
+          </a:p>
+          <a:p>
+            <a:r>
+              <a:rPr lang="en-US" dirty="0"/>
+              <a:t>Create a &lt;name&gt;.</a:t>
+            </a:r>
+            <a:r>
+              <a:rPr lang="en-US" dirty="0" err="1"/>
+              <a:t>py</a:t>
+            </a:r>
+            <a:r>
+              <a:rPr lang="en-US" dirty="0"/>
+              <a:t> file</a:t>
+            </a:r>
+          </a:p>
+          <a:p>
+            <a:r>
+              <a:rPr lang="en-US" dirty="0"/>
+              <a:t>Enter Code and run by:</a:t>
+            </a:r>
+          </a:p>
+          <a:p>
+            <a:pPr lvl="1"/>
+            <a:r>
+              <a:rPr lang="en-US" dirty="0"/>
+              <a:t>Clicking Run Python File in upper right corner</a:t>
+            </a:r>
+          </a:p>
+          <a:p>
+            <a:pPr lvl="1"/>
+            <a:r>
+              <a:rPr lang="en-US" dirty="0"/>
+              <a:t>Select Run &gt;&gt; Start Debugging &gt;&gt; Python Debugger &gt;&gt; Python File</a:t>
+            </a:r>
+          </a:p>
+          <a:p>
+            <a:pPr lvl="2"/>
+            <a:r>
+              <a:rPr lang="en-US" dirty="0"/>
+              <a:t>You can also create a launch </a:t>
+            </a:r>
+            <a:r>
+              <a:rPr lang="en-US" dirty="0" err="1"/>
+              <a:t>json</a:t>
+            </a:r>
+            <a:r>
+              <a:rPr lang="en-US" dirty="0"/>
+              <a:t> to skip past debug instructions each run</a:t>
+            </a:r>
+          </a:p>
+          <a:p>
+            <a:pPr lvl="1"/>
+            <a:r>
+              <a:rPr lang="en-US" dirty="0"/>
+              <a:t>In the bottom terminal window type:</a:t>
+            </a:r>
+          </a:p>
+          <a:p>
+            <a:pPr lvl="2"/>
+            <a:r>
+              <a:rPr lang="en-US" dirty="0"/>
+              <a:t>python &lt;name&gt;.</a:t>
+            </a:r>
+            <a:r>
+              <a:rPr lang="en-US" dirty="0" err="1"/>
+              <a:t>py</a:t>
+            </a:r>
+            <a:endParaRPr lang="en-US" dirty="0"/>
+          </a:p>
+        </p:txBody>
+      </p:sp>
+    </p:spTree>
+    <p:extLst>
+      <p:ext uri="{BB962C8B-B14F-4D97-AF65-F5344CB8AC3E}">
+        <p14:creationId xmlns:p14="http://schemas.microsoft.com/office/powerpoint/2010/main" val="1247533024"/>
+      </p:ext>
+    </p:extLst>
+  </p:cSld>
+  <p:clrMapOvr>
+    <a:masterClrMapping/>
+  </p:clrMapOvr>
+</p:sld>
+</file>
+
+<file path=ppt/slides/slide15.xml><?xml version="1.0" encoding="utf-8"?>
+<p:sld xmlns:a="http://schemas.openxmlformats.org/drawingml/2006/main" xmlns:r="http://schemas.openxmlformats.org/officeDocument/2006/relationships" xmlns:p="http://schemas.openxmlformats.org/presentationml/2006/main">
+  <p:cSld>
+    <p:spTree>
+      <p:nvGrpSpPr>
+        <p:cNvPr id="1" name=""/>
+        <p:cNvGrpSpPr/>
+        <p:nvPr/>
+      </p:nvGrpSpPr>
+      <p:grpSpPr>
+        <a:xfrm>
+          <a:off x="0" y="0"/>
+          <a:ext cx="0" cy="0"/>
+          <a:chOff x="0" y="0"/>
+          <a:chExt cx="0" cy="0"/>
+        </a:xfrm>
+      </p:grpSpPr>
+      <p:pic>
+        <p:nvPicPr>
+          <p:cNvPr id="3" name="Picture 2">
+            <a:extLst>
+              <a:ext uri="{FF2B5EF4-FFF2-40B4-BE49-F238E27FC236}">
+                <a16:creationId xmlns:a16="http://schemas.microsoft.com/office/drawing/2014/main" id="{8EF1F6F9-D478-4C56-85A4-C07BDF1B1E76}"/>
+              </a:ext>
+            </a:extLst>
+          </p:cNvPr>
+          <p:cNvPicPr>
+            <a:picLocks noChangeAspect="1"/>
+          </p:cNvPicPr>
+          <p:nvPr/>
+        </p:nvPicPr>
+        <p:blipFill>
+          <a:blip r:embed="rId2"/>
+          <a:stretch>
+            <a:fillRect/>
+          </a:stretch>
+        </p:blipFill>
+        <p:spPr>
+          <a:xfrm>
+            <a:off x="2923644" y="1380560"/>
+            <a:ext cx="2293819" cy="3810330"/>
+          </a:xfrm>
+          <a:prstGeom prst="rect">
+            <a:avLst/>
+          </a:prstGeom>
+        </p:spPr>
+      </p:pic>
+      <p:pic>
+        <p:nvPicPr>
+          <p:cNvPr id="5" name="Picture 4">
+            <a:extLst>
+              <a:ext uri="{FF2B5EF4-FFF2-40B4-BE49-F238E27FC236}">
+                <a16:creationId xmlns:a16="http://schemas.microsoft.com/office/drawing/2014/main" id="{0E8DA516-258E-1C98-4A47-7DC5B3A46C59}"/>
+              </a:ext>
+            </a:extLst>
+          </p:cNvPr>
+          <p:cNvPicPr>
+            <a:picLocks noChangeAspect="1"/>
+          </p:cNvPicPr>
+          <p:nvPr/>
+        </p:nvPicPr>
+        <p:blipFill>
+          <a:blip r:embed="rId3"/>
+          <a:stretch>
+            <a:fillRect/>
+          </a:stretch>
+        </p:blipFill>
+        <p:spPr>
+          <a:xfrm>
+            <a:off x="5627517" y="1400225"/>
+            <a:ext cx="3025402" cy="3452159"/>
+          </a:xfrm>
+          <a:prstGeom prst="rect">
+            <a:avLst/>
+          </a:prstGeom>
+        </p:spPr>
+      </p:pic>
+      <p:sp>
+        <p:nvSpPr>
+          <p:cNvPr id="6" name="Rectangle 5">
+            <a:extLst>
+              <a:ext uri="{FF2B5EF4-FFF2-40B4-BE49-F238E27FC236}">
+                <a16:creationId xmlns:a16="http://schemas.microsoft.com/office/drawing/2014/main" id="{57CEFECD-99AE-F4B0-C1C9-EE78338E554D}"/>
+              </a:ext>
+            </a:extLst>
+          </p:cNvPr>
+          <p:cNvSpPr/>
+          <p:nvPr/>
+        </p:nvSpPr>
+        <p:spPr>
+          <a:xfrm>
+            <a:off x="2923644" y="3126304"/>
+            <a:ext cx="360330" cy="263525"/>
+          </a:xfrm>
+          <a:prstGeom prst="rect">
+            <a:avLst/>
+          </a:prstGeom>
+          <a:noFill/>
+          <a:ln w="38100">
+            <a:solidFill>
+              <a:srgbClr val="FF0000"/>
+            </a:solidFill>
+          </a:ln>
+        </p:spPr>
+        <p:style>
+          <a:lnRef idx="2">
+            <a:schemeClr val="accent1">
+              <a:shade val="15000"/>
+            </a:schemeClr>
+          </a:lnRef>
+          <a:fillRef idx="1">
+            <a:schemeClr val="accent1"/>
+          </a:fillRef>
+          <a:effectRef idx="0">
+            <a:schemeClr val="accent1"/>
+          </a:effectRef>
+          <a:fontRef idx="minor">
+            <a:schemeClr val="lt1"/>
+          </a:fontRef>
+        </p:style>
+        <p:txBody>
+          <a:bodyPr rtlCol="0" anchor="ctr"/>
+          <a:lstStyle/>
+          <a:p>
+            <a:pPr algn="ctr"/>
+            <a:endParaRPr lang="en-US"/>
+          </a:p>
+        </p:txBody>
+      </p:sp>
+      <p:sp>
+        <p:nvSpPr>
+          <p:cNvPr id="7" name="Rectangle 6">
+            <a:extLst>
+              <a:ext uri="{FF2B5EF4-FFF2-40B4-BE49-F238E27FC236}">
+                <a16:creationId xmlns:a16="http://schemas.microsoft.com/office/drawing/2014/main" id="{8000F51B-FFA7-DE6C-F844-9A3A76818985}"/>
+              </a:ext>
+            </a:extLst>
+          </p:cNvPr>
+          <p:cNvSpPr/>
+          <p:nvPr/>
+        </p:nvSpPr>
+        <p:spPr>
+          <a:xfrm>
+            <a:off x="5960347" y="1927384"/>
+            <a:ext cx="2359741" cy="758572"/>
+          </a:xfrm>
+          <a:prstGeom prst="rect">
+            <a:avLst/>
+          </a:prstGeom>
+          <a:noFill/>
+          <a:ln w="38100">
+            <a:solidFill>
+              <a:srgbClr val="FF0000"/>
+            </a:solidFill>
+          </a:ln>
+        </p:spPr>
+        <p:style>
+          <a:lnRef idx="2">
+            <a:schemeClr val="accent1">
+              <a:shade val="15000"/>
+            </a:schemeClr>
+          </a:lnRef>
+          <a:fillRef idx="1">
+            <a:schemeClr val="accent1"/>
+          </a:fillRef>
+          <a:effectRef idx="0">
+            <a:schemeClr val="accent1"/>
+          </a:effectRef>
+          <a:fontRef idx="minor">
+            <a:schemeClr val="lt1"/>
+          </a:fontRef>
+        </p:style>
+        <p:txBody>
+          <a:bodyPr rtlCol="0" anchor="ctr"/>
+          <a:lstStyle/>
+          <a:p>
+            <a:pPr algn="ctr"/>
+            <a:endParaRPr lang="en-US"/>
+          </a:p>
+        </p:txBody>
+      </p:sp>
+      <p:sp>
+        <p:nvSpPr>
+          <p:cNvPr id="8" name="TextBox 7">
+            <a:extLst>
+              <a:ext uri="{FF2B5EF4-FFF2-40B4-BE49-F238E27FC236}">
+                <a16:creationId xmlns:a16="http://schemas.microsoft.com/office/drawing/2014/main" id="{B70FEFC2-E951-6164-9A43-57E526FD14B3}"/>
+              </a:ext>
+            </a:extLst>
+          </p:cNvPr>
+          <p:cNvSpPr txBox="1"/>
+          <p:nvPr/>
+        </p:nvSpPr>
+        <p:spPr>
+          <a:xfrm>
+            <a:off x="3103809" y="767314"/>
+            <a:ext cx="1772991" cy="369332"/>
+          </a:xfrm>
+          <a:prstGeom prst="rect">
+            <a:avLst/>
+          </a:prstGeom>
+          <a:noFill/>
+        </p:spPr>
+        <p:txBody>
+          <a:bodyPr wrap="square" rtlCol="0">
+            <a:spAutoFit/>
+          </a:bodyPr>
+          <a:lstStyle/>
+          <a:p>
+            <a:r>
+              <a:rPr lang="en-US" dirty="0"/>
+              <a:t>Select Widgets</a:t>
+            </a:r>
+          </a:p>
+        </p:txBody>
+      </p:sp>
+      <p:sp>
+        <p:nvSpPr>
+          <p:cNvPr id="9" name="TextBox 8">
+            <a:extLst>
+              <a:ext uri="{FF2B5EF4-FFF2-40B4-BE49-F238E27FC236}">
+                <a16:creationId xmlns:a16="http://schemas.microsoft.com/office/drawing/2014/main" id="{BC711F26-90B2-508A-419E-2128113B261F}"/>
+              </a:ext>
+            </a:extLst>
+          </p:cNvPr>
+          <p:cNvSpPr txBox="1"/>
+          <p:nvPr/>
+        </p:nvSpPr>
+        <p:spPr>
+          <a:xfrm>
+            <a:off x="6013698" y="767314"/>
+            <a:ext cx="2253038" cy="369332"/>
+          </a:xfrm>
+          <a:prstGeom prst="rect">
+            <a:avLst/>
+          </a:prstGeom>
+          <a:noFill/>
+        </p:spPr>
+        <p:txBody>
+          <a:bodyPr wrap="square" rtlCol="0">
+            <a:spAutoFit/>
+          </a:bodyPr>
+          <a:lstStyle/>
+          <a:p>
+            <a:r>
+              <a:rPr lang="en-US" dirty="0"/>
+              <a:t>Install Extensions</a:t>
+            </a:r>
+          </a:p>
+        </p:txBody>
+      </p:sp>
+    </p:spTree>
+    <p:extLst>
+      <p:ext uri="{BB962C8B-B14F-4D97-AF65-F5344CB8AC3E}">
+        <p14:creationId xmlns:p14="http://schemas.microsoft.com/office/powerpoint/2010/main" val="3490545102"/>
+      </p:ext>
+    </p:extLst>
+  </p:cSld>
+  <p:clrMapOvr>
+    <a:masterClrMapping/>
+  </p:clrMapOvr>
+</p:sld>
+</file>
+
+<file path=ppt/slides/slide16.xml><?xml version="1.0" encoding="utf-8"?>
+<p:sld xmlns:a="http://schemas.openxmlformats.org/drawingml/2006/main" xmlns:r="http://schemas.openxmlformats.org/officeDocument/2006/relationships" xmlns:p="http://schemas.openxmlformats.org/presentationml/2006/main">
+  <p:cSld>
+    <p:spTree>
+      <p:nvGrpSpPr>
+        <p:cNvPr id="1" name=""/>
+        <p:cNvGrpSpPr/>
+        <p:nvPr/>
+      </p:nvGrpSpPr>
+      <p:grpSpPr>
+        <a:xfrm>
+          <a:off x="0" y="0"/>
+          <a:ext cx="0" cy="0"/>
+          <a:chOff x="0" y="0"/>
+          <a:chExt cx="0" cy="0"/>
+        </a:xfrm>
+      </p:grpSpPr>
+      <p:pic>
+        <p:nvPicPr>
+          <p:cNvPr id="2" name="Picture 1">
+            <a:extLst>
+              <a:ext uri="{FF2B5EF4-FFF2-40B4-BE49-F238E27FC236}">
+                <a16:creationId xmlns:a16="http://schemas.microsoft.com/office/drawing/2014/main" id="{D7F7FDA2-C44F-946F-1AEF-2B50C2D8D9BA}"/>
+              </a:ext>
+            </a:extLst>
+          </p:cNvPr>
+          <p:cNvPicPr>
+            <a:picLocks noChangeAspect="1"/>
+          </p:cNvPicPr>
+          <p:nvPr/>
+        </p:nvPicPr>
+        <p:blipFill>
+          <a:blip r:embed="rId2"/>
+          <a:stretch>
+            <a:fillRect/>
+          </a:stretch>
+        </p:blipFill>
+        <p:spPr>
+          <a:xfrm>
+            <a:off x="716031" y="700312"/>
+            <a:ext cx="2293819" cy="3810330"/>
+          </a:xfrm>
+          <a:prstGeom prst="rect">
+            <a:avLst/>
+          </a:prstGeom>
+        </p:spPr>
+      </p:pic>
+      <p:sp>
+        <p:nvSpPr>
+          <p:cNvPr id="3" name="Rectangle 2">
+            <a:extLst>
+              <a:ext uri="{FF2B5EF4-FFF2-40B4-BE49-F238E27FC236}">
+                <a16:creationId xmlns:a16="http://schemas.microsoft.com/office/drawing/2014/main" id="{2210F1C8-568F-97D2-C505-3EADFAEBEF6E}"/>
+              </a:ext>
+            </a:extLst>
+          </p:cNvPr>
+          <p:cNvSpPr/>
+          <p:nvPr/>
+        </p:nvSpPr>
+        <p:spPr>
+          <a:xfrm>
+            <a:off x="716031" y="2085476"/>
+            <a:ext cx="360330" cy="263525"/>
+          </a:xfrm>
+          <a:prstGeom prst="rect">
+            <a:avLst/>
+          </a:prstGeom>
+          <a:noFill/>
+          <a:ln w="38100">
+            <a:solidFill>
+              <a:srgbClr val="FF0000"/>
+            </a:solidFill>
+          </a:ln>
+        </p:spPr>
+        <p:style>
+          <a:lnRef idx="2">
+            <a:schemeClr val="accent1">
+              <a:shade val="15000"/>
+            </a:schemeClr>
+          </a:lnRef>
+          <a:fillRef idx="1">
+            <a:schemeClr val="accent1"/>
+          </a:fillRef>
+          <a:effectRef idx="0">
+            <a:schemeClr val="accent1"/>
+          </a:effectRef>
+          <a:fontRef idx="minor">
+            <a:schemeClr val="lt1"/>
+          </a:fontRef>
+        </p:style>
+        <p:txBody>
+          <a:bodyPr rtlCol="0" anchor="ctr"/>
+          <a:lstStyle/>
+          <a:p>
+            <a:pPr algn="ctr"/>
+            <a:endParaRPr lang="en-US"/>
+          </a:p>
+        </p:txBody>
+      </p:sp>
+      <p:pic>
+        <p:nvPicPr>
+          <p:cNvPr id="5" name="Picture 4">
+            <a:extLst>
+              <a:ext uri="{FF2B5EF4-FFF2-40B4-BE49-F238E27FC236}">
+                <a16:creationId xmlns:a16="http://schemas.microsoft.com/office/drawing/2014/main" id="{4A28BE33-033E-DFDA-5DCF-9954B2272B71}"/>
+              </a:ext>
+            </a:extLst>
+          </p:cNvPr>
+          <p:cNvPicPr>
+            <a:picLocks noChangeAspect="1"/>
+          </p:cNvPicPr>
+          <p:nvPr/>
+        </p:nvPicPr>
+        <p:blipFill>
+          <a:blip r:embed="rId3"/>
+          <a:stretch>
+            <a:fillRect/>
+          </a:stretch>
+        </p:blipFill>
+        <p:spPr>
+          <a:xfrm>
+            <a:off x="8188353" y="799640"/>
+            <a:ext cx="2263336" cy="2187130"/>
+          </a:xfrm>
+          <a:prstGeom prst="rect">
+            <a:avLst/>
+          </a:prstGeom>
+        </p:spPr>
+      </p:pic>
+      <p:pic>
+        <p:nvPicPr>
+          <p:cNvPr id="7" name="Picture 6">
+            <a:extLst>
+              <a:ext uri="{FF2B5EF4-FFF2-40B4-BE49-F238E27FC236}">
+                <a16:creationId xmlns:a16="http://schemas.microsoft.com/office/drawing/2014/main" id="{E4182293-86D8-CE00-AE02-42D72CD17B86}"/>
+              </a:ext>
+            </a:extLst>
+          </p:cNvPr>
+          <p:cNvPicPr>
+            <a:picLocks noChangeAspect="1"/>
+          </p:cNvPicPr>
+          <p:nvPr/>
+        </p:nvPicPr>
+        <p:blipFill>
+          <a:blip r:embed="rId4"/>
+          <a:stretch>
+            <a:fillRect/>
+          </a:stretch>
+        </p:blipFill>
+        <p:spPr>
+          <a:xfrm>
+            <a:off x="4470422" y="769688"/>
+            <a:ext cx="2453853" cy="2796782"/>
+          </a:xfrm>
+          <a:prstGeom prst="rect">
+            <a:avLst/>
+          </a:prstGeom>
+        </p:spPr>
+      </p:pic>
+      <p:sp>
+        <p:nvSpPr>
+          <p:cNvPr id="8" name="Rectangle 7">
+            <a:extLst>
+              <a:ext uri="{FF2B5EF4-FFF2-40B4-BE49-F238E27FC236}">
+                <a16:creationId xmlns:a16="http://schemas.microsoft.com/office/drawing/2014/main" id="{F7B5C6AA-F1F5-4865-4577-88F77B99103B}"/>
+              </a:ext>
+            </a:extLst>
+          </p:cNvPr>
+          <p:cNvSpPr/>
+          <p:nvPr/>
+        </p:nvSpPr>
+        <p:spPr>
+          <a:xfrm>
+            <a:off x="6118096" y="1056159"/>
+            <a:ext cx="360330" cy="263525"/>
+          </a:xfrm>
+          <a:prstGeom prst="rect">
+            <a:avLst/>
+          </a:prstGeom>
+          <a:noFill/>
+          <a:ln w="38100">
+            <a:solidFill>
+              <a:srgbClr val="FF0000"/>
+            </a:solidFill>
+          </a:ln>
+        </p:spPr>
+        <p:style>
+          <a:lnRef idx="2">
+            <a:schemeClr val="accent1">
+              <a:shade val="15000"/>
+            </a:schemeClr>
+          </a:lnRef>
+          <a:fillRef idx="1">
+            <a:schemeClr val="accent1"/>
+          </a:fillRef>
+          <a:effectRef idx="0">
+            <a:schemeClr val="accent1"/>
+          </a:effectRef>
+          <a:fontRef idx="minor">
+            <a:schemeClr val="lt1"/>
+          </a:fontRef>
+        </p:style>
+        <p:txBody>
+          <a:bodyPr rtlCol="0" anchor="ctr"/>
+          <a:lstStyle/>
+          <a:p>
+            <a:pPr algn="ctr"/>
+            <a:endParaRPr lang="en-US"/>
+          </a:p>
+        </p:txBody>
+      </p:sp>
+      <p:sp>
+        <p:nvSpPr>
+          <p:cNvPr id="9" name="Rectangle 8">
+            <a:extLst>
+              <a:ext uri="{FF2B5EF4-FFF2-40B4-BE49-F238E27FC236}">
+                <a16:creationId xmlns:a16="http://schemas.microsoft.com/office/drawing/2014/main" id="{1FDD3D63-9E7D-E75B-A56D-462CBC9D1212}"/>
+              </a:ext>
+            </a:extLst>
+          </p:cNvPr>
+          <p:cNvSpPr/>
+          <p:nvPr/>
+        </p:nvSpPr>
+        <p:spPr>
+          <a:xfrm>
+            <a:off x="8114050" y="1629680"/>
+            <a:ext cx="2263336" cy="263525"/>
+          </a:xfrm>
+          <a:prstGeom prst="rect">
+            <a:avLst/>
+          </a:prstGeom>
+          <a:noFill/>
+          <a:ln w="38100">
+            <a:solidFill>
+              <a:srgbClr val="FF0000"/>
+            </a:solidFill>
+          </a:ln>
+        </p:spPr>
+        <p:style>
+          <a:lnRef idx="2">
+            <a:schemeClr val="accent1">
+              <a:shade val="15000"/>
+            </a:schemeClr>
+          </a:lnRef>
+          <a:fillRef idx="1">
+            <a:schemeClr val="accent1"/>
+          </a:fillRef>
+          <a:effectRef idx="0">
+            <a:schemeClr val="accent1"/>
+          </a:effectRef>
+          <a:fontRef idx="minor">
+            <a:schemeClr val="lt1"/>
+          </a:fontRef>
+        </p:style>
+        <p:txBody>
+          <a:bodyPr rtlCol="0" anchor="ctr"/>
+          <a:lstStyle/>
+          <a:p>
+            <a:pPr algn="ctr"/>
+            <a:endParaRPr lang="en-US"/>
+          </a:p>
+        </p:txBody>
+      </p:sp>
+      <p:pic>
+        <p:nvPicPr>
+          <p:cNvPr id="11" name="Picture 10">
+            <a:extLst>
+              <a:ext uri="{FF2B5EF4-FFF2-40B4-BE49-F238E27FC236}">
+                <a16:creationId xmlns:a16="http://schemas.microsoft.com/office/drawing/2014/main" id="{0AB5AF4A-B2A1-A984-D632-E59F037DA6AE}"/>
+              </a:ext>
+            </a:extLst>
+          </p:cNvPr>
+          <p:cNvPicPr>
+            <a:picLocks noChangeAspect="1"/>
+          </p:cNvPicPr>
+          <p:nvPr/>
+        </p:nvPicPr>
+        <p:blipFill>
+          <a:blip r:embed="rId5"/>
+          <a:stretch>
+            <a:fillRect/>
+          </a:stretch>
+        </p:blipFill>
+        <p:spPr>
+          <a:xfrm>
+            <a:off x="1000841" y="4872041"/>
+            <a:ext cx="9450848" cy="1906811"/>
+          </a:xfrm>
+          <a:prstGeom prst="rect">
+            <a:avLst/>
+          </a:prstGeom>
+        </p:spPr>
+      </p:pic>
+      <p:sp>
+        <p:nvSpPr>
+          <p:cNvPr id="12" name="Rectangle 11">
+            <a:extLst>
+              <a:ext uri="{FF2B5EF4-FFF2-40B4-BE49-F238E27FC236}">
+                <a16:creationId xmlns:a16="http://schemas.microsoft.com/office/drawing/2014/main" id="{D756BBA2-97AE-01BB-96C2-B2FD8340DBCF}"/>
+              </a:ext>
+            </a:extLst>
+          </p:cNvPr>
+          <p:cNvSpPr/>
+          <p:nvPr/>
+        </p:nvSpPr>
+        <p:spPr>
+          <a:xfrm>
+            <a:off x="1000841" y="5968184"/>
+            <a:ext cx="5766441" cy="263525"/>
+          </a:xfrm>
+          <a:prstGeom prst="rect">
+            <a:avLst/>
+          </a:prstGeom>
+          <a:noFill/>
+          <a:ln w="38100">
+            <a:solidFill>
+              <a:srgbClr val="FF0000"/>
+            </a:solidFill>
+          </a:ln>
+        </p:spPr>
+        <p:style>
+          <a:lnRef idx="2">
+            <a:schemeClr val="accent1">
+              <a:shade val="15000"/>
+            </a:schemeClr>
+          </a:lnRef>
+          <a:fillRef idx="1">
+            <a:schemeClr val="accent1"/>
+          </a:fillRef>
+          <a:effectRef idx="0">
+            <a:schemeClr val="accent1"/>
+          </a:effectRef>
+          <a:fontRef idx="minor">
+            <a:schemeClr val="lt1"/>
+          </a:fontRef>
+        </p:style>
+        <p:txBody>
+          <a:bodyPr rtlCol="0" anchor="ctr"/>
+          <a:lstStyle/>
+          <a:p>
+            <a:pPr algn="ctr"/>
+            <a:endParaRPr lang="en-US"/>
+          </a:p>
+        </p:txBody>
+      </p:sp>
+      <p:sp>
+        <p:nvSpPr>
+          <p:cNvPr id="13" name="TextBox 12">
+            <a:extLst>
+              <a:ext uri="{FF2B5EF4-FFF2-40B4-BE49-F238E27FC236}">
+                <a16:creationId xmlns:a16="http://schemas.microsoft.com/office/drawing/2014/main" id="{5C4DD2EA-DC94-97E7-C960-05F8FD82D4FF}"/>
+              </a:ext>
+            </a:extLst>
+          </p:cNvPr>
+          <p:cNvSpPr txBox="1"/>
+          <p:nvPr/>
+        </p:nvSpPr>
+        <p:spPr>
+          <a:xfrm>
+            <a:off x="75792" y="317872"/>
+            <a:ext cx="3574296" cy="369332"/>
+          </a:xfrm>
+          <a:prstGeom prst="rect">
+            <a:avLst/>
+          </a:prstGeom>
+          <a:noFill/>
+        </p:spPr>
+        <p:txBody>
+          <a:bodyPr wrap="square" rtlCol="0">
+            <a:spAutoFit/>
+          </a:bodyPr>
+          <a:lstStyle/>
+          <a:p>
+            <a:r>
+              <a:rPr lang="en-US" dirty="0"/>
+              <a:t>Run Script Using Debug Menu</a:t>
+            </a:r>
+          </a:p>
+        </p:txBody>
+      </p:sp>
+      <p:sp>
+        <p:nvSpPr>
+          <p:cNvPr id="14" name="TextBox 13">
+            <a:extLst>
+              <a:ext uri="{FF2B5EF4-FFF2-40B4-BE49-F238E27FC236}">
+                <a16:creationId xmlns:a16="http://schemas.microsoft.com/office/drawing/2014/main" id="{3E724BC9-7AC0-FC90-151B-E7BD23F25D2E}"/>
+              </a:ext>
+            </a:extLst>
+          </p:cNvPr>
+          <p:cNvSpPr txBox="1"/>
+          <p:nvPr/>
+        </p:nvSpPr>
+        <p:spPr>
+          <a:xfrm>
+            <a:off x="4085032" y="317872"/>
+            <a:ext cx="3574297" cy="369332"/>
+          </a:xfrm>
+          <a:prstGeom prst="rect">
+            <a:avLst/>
+          </a:prstGeom>
+          <a:noFill/>
+        </p:spPr>
+        <p:txBody>
+          <a:bodyPr wrap="square" rtlCol="0">
+            <a:spAutoFit/>
+          </a:bodyPr>
+          <a:lstStyle/>
+          <a:p>
+            <a:r>
+              <a:rPr lang="en-US" dirty="0"/>
+              <a:t>Run Script Using “Run” Button</a:t>
+            </a:r>
+          </a:p>
+        </p:txBody>
+      </p:sp>
+      <p:sp>
+        <p:nvSpPr>
+          <p:cNvPr id="15" name="TextBox 14">
+            <a:extLst>
+              <a:ext uri="{FF2B5EF4-FFF2-40B4-BE49-F238E27FC236}">
+                <a16:creationId xmlns:a16="http://schemas.microsoft.com/office/drawing/2014/main" id="{5C90A91B-BADA-872E-CC47-B15C0DA8A743}"/>
+              </a:ext>
+            </a:extLst>
+          </p:cNvPr>
+          <p:cNvSpPr txBox="1"/>
+          <p:nvPr/>
+        </p:nvSpPr>
+        <p:spPr>
+          <a:xfrm>
+            <a:off x="7659328" y="153309"/>
+            <a:ext cx="3574297" cy="646331"/>
+          </a:xfrm>
+          <a:prstGeom prst="rect">
+            <a:avLst/>
+          </a:prstGeom>
+          <a:noFill/>
+        </p:spPr>
+        <p:txBody>
+          <a:bodyPr wrap="square" rtlCol="0">
+            <a:spAutoFit/>
+          </a:bodyPr>
+          <a:lstStyle/>
+          <a:p>
+            <a:r>
+              <a:rPr lang="en-US" dirty="0"/>
+              <a:t>Create Launch JSON to Save Options</a:t>
+            </a:r>
+          </a:p>
+        </p:txBody>
+      </p:sp>
+      <p:sp>
+        <p:nvSpPr>
+          <p:cNvPr id="16" name="TextBox 15">
+            <a:extLst>
+              <a:ext uri="{FF2B5EF4-FFF2-40B4-BE49-F238E27FC236}">
+                <a16:creationId xmlns:a16="http://schemas.microsoft.com/office/drawing/2014/main" id="{FE7662CF-64F9-4673-DB08-4E118FF0CE90}"/>
+              </a:ext>
+            </a:extLst>
+          </p:cNvPr>
+          <p:cNvSpPr txBox="1"/>
+          <p:nvPr/>
+        </p:nvSpPr>
+        <p:spPr>
+          <a:xfrm>
+            <a:off x="4085031" y="4477947"/>
+            <a:ext cx="3574297" cy="369332"/>
+          </a:xfrm>
+          <a:prstGeom prst="rect">
+            <a:avLst/>
+          </a:prstGeom>
+          <a:noFill/>
+        </p:spPr>
+        <p:txBody>
+          <a:bodyPr wrap="square" rtlCol="0">
+            <a:spAutoFit/>
+          </a:bodyPr>
+          <a:lstStyle/>
+          <a:p>
+            <a:r>
+              <a:rPr lang="en-US" dirty="0"/>
+              <a:t>Run Script Using Terminal</a:t>
+            </a:r>
+          </a:p>
+        </p:txBody>
+      </p:sp>
+    </p:spTree>
+    <p:extLst>
+      <p:ext uri="{BB962C8B-B14F-4D97-AF65-F5344CB8AC3E}">
+        <p14:creationId xmlns:p14="http://schemas.microsoft.com/office/powerpoint/2010/main" val="575848268"/>
+      </p:ext>
+    </p:extLst>
+  </p:cSld>
+  <p:clrMapOvr>
+    <a:masterClrMapping/>
+  </p:clrMapOvr>
+</p:sld>
+</file>
+
+<file path=ppt/slides/slide17.xml><?xml version="1.0" encoding="utf-8"?>
+<p:sld xmlns:a="http://schemas.openxmlformats.org/drawingml/2006/main" xmlns:r="http://schemas.openxmlformats.org/officeDocument/2006/relationships" xmlns:p="http://schemas.openxmlformats.org/presentationml/2006/main">
+  <p:cSld>
+    <p:spTree>
+      <p:nvGrpSpPr>
+        <p:cNvPr id="1" name=""/>
+        <p:cNvGrpSpPr/>
+        <p:nvPr/>
+      </p:nvGrpSpPr>
+      <p:grpSpPr>
+        <a:xfrm>
+          <a:off x="0" y="0"/>
+          <a:ext cx="0" cy="0"/>
+          <a:chOff x="0" y="0"/>
+          <a:chExt cx="0" cy="0"/>
+        </a:xfrm>
+      </p:grpSpPr>
+      <p:sp>
+        <p:nvSpPr>
+          <p:cNvPr id="2" name="Title 1">
+            <a:extLst>
+              <a:ext uri="{FF2B5EF4-FFF2-40B4-BE49-F238E27FC236}">
+                <a16:creationId xmlns:a16="http://schemas.microsoft.com/office/drawing/2014/main" id="{A2BFE9D6-61E9-9967-3788-9DD994259A69}"/>
+              </a:ext>
+            </a:extLst>
+          </p:cNvPr>
+          <p:cNvSpPr>
+            <a:spLocks noGrp="1"/>
+          </p:cNvSpPr>
+          <p:nvPr>
+            <p:ph type="title"/>
+          </p:nvPr>
+        </p:nvSpPr>
+        <p:spPr/>
+        <p:txBody>
+          <a:bodyPr/>
+          <a:lstStyle/>
+          <a:p>
+            <a:r>
+              <a:rPr lang="en-US" dirty="0"/>
+              <a:t>Installing Modules</a:t>
+            </a:r>
+          </a:p>
+        </p:txBody>
+      </p:sp>
+      <p:sp>
+        <p:nvSpPr>
+          <p:cNvPr id="3" name="Content Placeholder 2">
+            <a:extLst>
+              <a:ext uri="{FF2B5EF4-FFF2-40B4-BE49-F238E27FC236}">
+                <a16:creationId xmlns:a16="http://schemas.microsoft.com/office/drawing/2014/main" id="{95A6A236-BEC2-240B-1A7C-75889931A5F6}"/>
+              </a:ext>
+            </a:extLst>
+          </p:cNvPr>
+          <p:cNvSpPr>
+            <a:spLocks noGrp="1"/>
+          </p:cNvSpPr>
+          <p:nvPr>
+            <p:ph idx="1"/>
+          </p:nvPr>
+        </p:nvSpPr>
+        <p:spPr/>
+        <p:txBody>
+          <a:bodyPr>
+            <a:normAutofit/>
+          </a:bodyPr>
+          <a:lstStyle/>
+          <a:p>
+            <a:r>
+              <a:rPr lang="en-US" dirty="0"/>
+              <a:t>Most modules use pip to install:</a:t>
+            </a:r>
+          </a:p>
+          <a:p>
+            <a:pPr lvl="1"/>
+            <a:r>
+              <a:rPr lang="en-US" dirty="0"/>
+              <a:t>pip install pandas</a:t>
+            </a:r>
+          </a:p>
+          <a:p>
+            <a:pPr lvl="1"/>
+            <a:r>
+              <a:rPr lang="en-US" dirty="0"/>
+              <a:t>pip install pandas matplotlib scikit-learn</a:t>
+            </a:r>
+          </a:p>
+          <a:p>
+            <a:r>
+              <a:rPr lang="en-US" dirty="0"/>
+              <a:t>Popular modules:</a:t>
+            </a:r>
+          </a:p>
+          <a:p>
+            <a:pPr lvl="1"/>
+            <a:r>
+              <a:rPr lang="en-US" dirty="0"/>
+              <a:t>Pandas – Data Analysis/Tabular data</a:t>
+            </a:r>
+          </a:p>
+          <a:p>
+            <a:pPr lvl="1"/>
+            <a:r>
+              <a:rPr lang="en-US" dirty="0" err="1"/>
+              <a:t>Numpy</a:t>
+            </a:r>
+            <a:r>
+              <a:rPr lang="en-US" dirty="0"/>
+              <a:t> – Scientific computing, arrays, matrices (included with pandas install)</a:t>
+            </a:r>
+          </a:p>
+          <a:p>
+            <a:pPr lvl="1"/>
+            <a:r>
+              <a:rPr lang="en-US" dirty="0"/>
+              <a:t>Matplotlib, Seaborn – Charts and graphs</a:t>
+            </a:r>
+          </a:p>
+          <a:p>
+            <a:pPr lvl="1"/>
+            <a:r>
+              <a:rPr lang="en-US" dirty="0"/>
+              <a:t>Scikit Learn, Tensor Flow – Machine Learning/Modelling</a:t>
+            </a:r>
+          </a:p>
+          <a:p>
+            <a:pPr lvl="1"/>
+            <a:r>
+              <a:rPr lang="en-US" dirty="0"/>
+              <a:t>Beautiful Soup – Web Scraping</a:t>
+            </a:r>
+          </a:p>
+          <a:p>
+            <a:pPr lvl="1"/>
+            <a:r>
+              <a:rPr lang="en-US" dirty="0" err="1"/>
+              <a:t>Openpyxl</a:t>
+            </a:r>
+            <a:r>
+              <a:rPr lang="en-US" dirty="0"/>
+              <a:t>, </a:t>
+            </a:r>
+            <a:r>
+              <a:rPr lang="en-US" dirty="0" err="1"/>
+              <a:t>Xlsxwriter</a:t>
+            </a:r>
+            <a:r>
+              <a:rPr lang="en-US" dirty="0"/>
+              <a:t> – creating and modifying Excel spreadsheets</a:t>
+            </a:r>
+          </a:p>
+          <a:p>
+            <a:pPr lvl="1"/>
+            <a:r>
+              <a:rPr lang="en-US" dirty="0"/>
+              <a:t>Multiple database connection modules</a:t>
+            </a:r>
+          </a:p>
+        </p:txBody>
+      </p:sp>
+    </p:spTree>
+    <p:extLst>
+      <p:ext uri="{BB962C8B-B14F-4D97-AF65-F5344CB8AC3E}">
+        <p14:creationId xmlns:p14="http://schemas.microsoft.com/office/powerpoint/2010/main" val="2491955574"/>
+      </p:ext>
+    </p:extLst>
+  </p:cSld>
+  <p:clrMapOvr>
+    <a:masterClrMapping/>
+  </p:clrMapOvr>
+</p:sld>
+</file>
+
+<file path=ppt/slides/slide18.xml><?xml version="1.0" encoding="utf-8"?>
+<p:sld xmlns:a="http://schemas.openxmlformats.org/drawingml/2006/main" xmlns:r="http://schemas.openxmlformats.org/officeDocument/2006/relationships" xmlns:p="http://schemas.openxmlformats.org/presentationml/2006/main">
+  <p:cSld>
+    <p:spTree>
+      <p:nvGrpSpPr>
+        <p:cNvPr id="1" name=""/>
+        <p:cNvGrpSpPr/>
+        <p:nvPr/>
+      </p:nvGrpSpPr>
+      <p:grpSpPr>
+        <a:xfrm>
+          <a:off x="0" y="0"/>
+          <a:ext cx="0" cy="0"/>
+          <a:chOff x="0" y="0"/>
+          <a:chExt cx="0" cy="0"/>
+        </a:xfrm>
+      </p:grpSpPr>
       <p:sp>
         <p:nvSpPr>
           <p:cNvPr id="2" name="Title 1">
@@ -5130,7 +6663,7 @@
 </p:sld>
 </file>
 
-<file path=ppt/slides/slide14.xml><?xml version="1.0" encoding="utf-8"?>
+<file path=ppt/slides/slide19.xml><?xml version="1.0" encoding="utf-8"?>
 <p:sld xmlns:a="http://schemas.openxmlformats.org/drawingml/2006/main" xmlns:r="http://schemas.openxmlformats.org/officeDocument/2006/relationships" xmlns:p="http://schemas.openxmlformats.org/presentationml/2006/main">
   <p:cSld>
     <p:spTree>
@@ -5283,7 +6816,7 @@
           <p:cNvPr id="2" name="Title 1">
             <a:extLst>
               <a:ext uri="{FF2B5EF4-FFF2-40B4-BE49-F238E27FC236}">
-                <a16:creationId xmlns:a16="http://schemas.microsoft.com/office/drawing/2014/main" id="{898AB9F0-1D93-8C70-55D7-6DB587561BAB}"/>
+                <a16:creationId xmlns:a16="http://schemas.microsoft.com/office/drawing/2014/main" id="{161ECF88-F862-534E-1D40-0C52B7E3D3BE}"/>
               </a:ext>
             </a:extLst>
           </p:cNvPr>
@@ -5301,7 +6834,7 @@
           <a:p>
             <a:r>
               <a:rPr lang="en-US" dirty="0"/>
-              <a:t>Personal Background</a:t>
+              <a:t>Presentation Goals</a:t>
             </a:r>
           </a:p>
         </p:txBody>
@@ -5311,7 +6844,7 @@
           <p:cNvPr id="3" name="Content Placeholder 2">
             <a:extLst>
               <a:ext uri="{FF2B5EF4-FFF2-40B4-BE49-F238E27FC236}">
-                <a16:creationId xmlns:a16="http://schemas.microsoft.com/office/drawing/2014/main" id="{DE118D11-AE10-E1A6-EF39-5C1F351C8452}"/>
+                <a16:creationId xmlns:a16="http://schemas.microsoft.com/office/drawing/2014/main" id="{6FB44663-3157-0939-1980-DAAD6A9964FC}"/>
               </a:ext>
             </a:extLst>
           </p:cNvPr>
@@ -5331,31 +6864,25 @@
           <a:p>
             <a:r>
               <a:rPr lang="en-US" sz="2400" dirty="0"/>
-              <a:t>Started at the Anderson Center in Feb 2023</a:t>
-            </a:r>
+              <a:t>Understanding Python and its role in data analytics.</a:t>
+            </a:r>
+          </a:p>
+          <a:p>
+            <a:endParaRPr lang="en-US" sz="2400" dirty="0"/>
           </a:p>
           <a:p>
             <a:r>
               <a:rPr lang="en-US" sz="2400" dirty="0"/>
-              <a:t>Primary focus is Learning Health Networks</a:t>
-            </a:r>
+              <a:t>Setting up Python, software, and tools on your computer.</a:t>
+            </a:r>
+          </a:p>
+          <a:p>
+            <a:endParaRPr lang="en-US" sz="2400" dirty="0"/>
           </a:p>
           <a:p>
             <a:r>
               <a:rPr lang="en-US" sz="2400" dirty="0"/>
-              <a:t>Using Python as primary analytics tool for 7 to 8 years</a:t>
-            </a:r>
-          </a:p>
-          <a:p>
-            <a:r>
-              <a:rPr lang="en-US" sz="2400" dirty="0"/>
-              <a:t>Originally used some combination of SAS or R</a:t>
-            </a:r>
-          </a:p>
-          <a:p>
-            <a:r>
-              <a:rPr lang="en-US" sz="2400" dirty="0"/>
-              <a:t>No CS degree (Math, Economics)</a:t>
+              <a:t>Implementing Python into your workflow for analytics using modules, scripts, Excel, and Power BI.</a:t>
             </a:r>
           </a:p>
         </p:txBody>
@@ -5363,7 +6890,7 @@
     </p:spTree>
     <p:extLst>
       <p:ext uri="{BB962C8B-B14F-4D97-AF65-F5344CB8AC3E}">
-        <p14:creationId xmlns:p14="http://schemas.microsoft.com/office/powerpoint/2010/main" val="541880142"/>
+        <p14:creationId xmlns:p14="http://schemas.microsoft.com/office/powerpoint/2010/main" val="2043150458"/>
       </p:ext>
     </p:extLst>
   </p:cSld>
@@ -5395,7 +6922,7 @@
           <p:cNvPr id="2" name="Title 1">
             <a:extLst>
               <a:ext uri="{FF2B5EF4-FFF2-40B4-BE49-F238E27FC236}">
-                <a16:creationId xmlns:a16="http://schemas.microsoft.com/office/drawing/2014/main" id="{F92F4D06-E3E8-DE96-A6DD-D67469D58D3F}"/>
+                <a16:creationId xmlns:a16="http://schemas.microsoft.com/office/drawing/2014/main" id="{898AB9F0-1D93-8C70-55D7-6DB587561BAB}"/>
               </a:ext>
             </a:extLst>
           </p:cNvPr>
@@ -5413,7 +6940,7 @@
           <a:p>
             <a:r>
               <a:rPr lang="en-US" dirty="0"/>
-              <a:t>Understanding Python and its Role in Data Analytics</a:t>
+              <a:t>Personal Background</a:t>
             </a:r>
           </a:p>
         </p:txBody>
@@ -5423,7 +6950,7 @@
           <p:cNvPr id="3" name="Content Placeholder 2">
             <a:extLst>
               <a:ext uri="{FF2B5EF4-FFF2-40B4-BE49-F238E27FC236}">
-                <a16:creationId xmlns:a16="http://schemas.microsoft.com/office/drawing/2014/main" id="{F6859F5C-BF7B-510C-627C-0361B848D345}"/>
+                <a16:creationId xmlns:a16="http://schemas.microsoft.com/office/drawing/2014/main" id="{DE118D11-AE10-E1A6-EF39-5C1F351C8452}"/>
               </a:ext>
             </a:extLst>
           </p:cNvPr>
@@ -5437,87 +6964,43 @@
         <p:spPr/>
         <p:txBody>
           <a:bodyPr>
-            <a:normAutofit fontScale="92500" lnSpcReduction="10000"/>
+            <a:normAutofit/>
           </a:bodyPr>
           <a:lstStyle/>
           <a:p>
             <a:r>
-              <a:rPr lang="en-US" dirty="0"/>
-              <a:t>Python is not a data analytics language</a:t>
-            </a:r>
-          </a:p>
-          <a:p>
-            <a:pPr lvl="1"/>
-            <a:r>
-              <a:rPr lang="en-US" dirty="0"/>
-              <a:t>It is a general-purpose language with modules built for data analysis, data science, data display, and data querying.</a:t>
-            </a:r>
-          </a:p>
-          <a:p>
-            <a:r>
-              <a:rPr lang="en-US" dirty="0"/>
-              <a:t>Modules provide the extensions to the language.</a:t>
-            </a:r>
-          </a:p>
-          <a:p>
-            <a:pPr lvl="1"/>
-            <a:r>
-              <a:rPr lang="en-US" dirty="0"/>
-              <a:t>Pandas</a:t>
-            </a:r>
-          </a:p>
-          <a:p>
-            <a:pPr lvl="1"/>
-            <a:r>
-              <a:rPr lang="en-US" dirty="0" err="1"/>
-              <a:t>Numpy</a:t>
-            </a:r>
-            <a:endParaRPr lang="en-US" dirty="0"/>
-          </a:p>
-          <a:p>
-            <a:pPr lvl="1"/>
-            <a:r>
-              <a:rPr lang="en-US" dirty="0"/>
-              <a:t>Matplotlib</a:t>
-            </a:r>
-          </a:p>
-          <a:p>
-            <a:pPr lvl="1"/>
-            <a:r>
-              <a:rPr lang="en-US" dirty="0"/>
-              <a:t>Scikit Learn</a:t>
-            </a:r>
-          </a:p>
-          <a:p>
-            <a:pPr lvl="1"/>
-            <a:r>
-              <a:rPr lang="en-US" dirty="0"/>
-              <a:t>Tensor Flow</a:t>
-            </a:r>
-          </a:p>
-          <a:p>
-            <a:pPr lvl="1"/>
-            <a:r>
-              <a:rPr lang="en-US" dirty="0"/>
-              <a:t>Database modules</a:t>
-            </a:r>
-          </a:p>
-          <a:p>
-            <a:r>
-              <a:rPr lang="en-US" dirty="0"/>
-              <a:t>Combining modules with the features of the language: loops, conditionals, classes, functions, etc. create the real power and strength of language.</a:t>
-            </a:r>
-          </a:p>
-          <a:p>
-            <a:r>
-              <a:rPr lang="en-US" dirty="0"/>
-              <a:t>Can now be integrated in Excel and Power BI.</a:t>
-            </a:r>
-          </a:p>
-          <a:p>
-            <a:r>
-              <a:rPr lang="en-US" dirty="0"/>
-              <a:t>https://github.com/AdamKortis/cchmc_python_getting_started</a:t>
+              <a:rPr lang="en-US" sz="2400" dirty="0"/>
+              <a:t>Started at the Anderson Center in Feb 2023</a:t>
+            </a:r>
+          </a:p>
+          <a:p>
+            <a:r>
+              <a:rPr lang="en-US" sz="2400" dirty="0"/>
+              <a:t>Primary focus is Learning Health Networks</a:t>
+            </a:r>
+          </a:p>
+          <a:p>
+            <a:r>
+              <a:rPr lang="en-US" sz="2400" dirty="0"/>
+              <a:t>Using Python as primary analytics tool for 7 to 8 years</a:t>
+            </a:r>
+          </a:p>
+          <a:p>
+            <a:r>
+              <a:rPr lang="en-US" sz="2400" dirty="0"/>
+              <a:t>Originally used some combination of SAS or R</a:t>
+            </a:r>
+          </a:p>
+          <a:p>
+            <a:r>
+              <a:rPr lang="en-US" sz="2400" dirty="0"/>
+              <a:t>No CS degree (Math, Economics)</a:t>
+            </a:r>
+          </a:p>
+          <a:p>
+            <a:r>
+              <a:rPr lang="en-US" sz="2400" dirty="0"/>
+              <a:t>Self-taught in Python and ran into some roadblocks</a:t>
             </a:r>
           </a:p>
         </p:txBody>
@@ -5525,7 +7008,7 @@
     </p:spTree>
     <p:extLst>
       <p:ext uri="{BB962C8B-B14F-4D97-AF65-F5344CB8AC3E}">
-        <p14:creationId xmlns:p14="http://schemas.microsoft.com/office/powerpoint/2010/main" val="910298586"/>
+        <p14:creationId xmlns:p14="http://schemas.microsoft.com/office/powerpoint/2010/main" val="541880142"/>
       </p:ext>
     </p:extLst>
   </p:cSld>
@@ -5557,7 +7040,7 @@
           <p:cNvPr id="2" name="Title 1">
             <a:extLst>
               <a:ext uri="{FF2B5EF4-FFF2-40B4-BE49-F238E27FC236}">
-                <a16:creationId xmlns:a16="http://schemas.microsoft.com/office/drawing/2014/main" id="{E9DB5B7C-22B6-D9DD-5D32-59170B91CCAD}"/>
+                <a16:creationId xmlns:a16="http://schemas.microsoft.com/office/drawing/2014/main" id="{F92F4D06-E3E8-DE96-A6DD-D67469D58D3F}"/>
               </a:ext>
             </a:extLst>
           </p:cNvPr>
@@ -5575,17 +7058,17 @@
           <a:p>
             <a:r>
               <a:rPr lang="en-US" dirty="0"/>
-              <a:t>Understanding Pros and Cons of Python</a:t>
-            </a:r>
-          </a:p>
-        </p:txBody>
-      </p:sp>
-      <p:sp>
-        <p:nvSpPr>
-          <p:cNvPr id="3" name="Text Placeholder 2">
+              <a:t>Understanding Python and its Role in Data Analytics</a:t>
+            </a:r>
+          </a:p>
+        </p:txBody>
+      </p:sp>
+      <p:sp>
+        <p:nvSpPr>
+          <p:cNvPr id="3" name="Content Placeholder 2">
             <a:extLst>
               <a:ext uri="{FF2B5EF4-FFF2-40B4-BE49-F238E27FC236}">
-                <a16:creationId xmlns:a16="http://schemas.microsoft.com/office/drawing/2014/main" id="{DA30F27B-FB23-1C7B-9328-379CB5E2F0AA}"/>
+                <a16:creationId xmlns:a16="http://schemas.microsoft.com/office/drawing/2014/main" id="{F6859F5C-BF7B-510C-627C-0361B848D345}"/>
               </a:ext>
             </a:extLst>
           </p:cNvPr>
@@ -5593,199 +7076,101 @@
             <a:spLocks noGrp="1"/>
           </p:cNvSpPr>
           <p:nvPr>
-            <p:ph type="body" idx="1"/>
+            <p:ph idx="1"/>
           </p:nvPr>
         </p:nvSpPr>
         <p:spPr/>
         <p:txBody>
-          <a:bodyPr/>
-          <a:lstStyle/>
-          <a:p>
-            <a:r>
-              <a:rPr lang="en-US" dirty="0"/>
-              <a:t>Pros</a:t>
-            </a:r>
-          </a:p>
-        </p:txBody>
-      </p:sp>
-      <p:sp>
-        <p:nvSpPr>
-          <p:cNvPr id="4" name="Content Placeholder 3">
-            <a:extLst>
-              <a:ext uri="{FF2B5EF4-FFF2-40B4-BE49-F238E27FC236}">
-                <a16:creationId xmlns:a16="http://schemas.microsoft.com/office/drawing/2014/main" id="{884D22AB-4240-D845-367F-FAE101D4A88C}"/>
-              </a:ext>
-            </a:extLst>
-          </p:cNvPr>
-          <p:cNvSpPr>
-            <a:spLocks noGrp="1"/>
-          </p:cNvSpPr>
-          <p:nvPr>
-            <p:ph sz="half" idx="2"/>
-          </p:nvPr>
-        </p:nvSpPr>
-        <p:spPr/>
-        <p:txBody>
           <a:bodyPr>
-            <a:normAutofit fontScale="92500"/>
+            <a:normAutofit fontScale="92500" lnSpcReduction="10000"/>
           </a:bodyPr>
           <a:lstStyle/>
           <a:p>
             <a:r>
               <a:rPr lang="en-US" dirty="0"/>
-              <a:t>Free Open Source</a:t>
-            </a:r>
-          </a:p>
-          <a:p>
-            <a:r>
-              <a:rPr lang="en-US" dirty="0"/>
-              <a:t>Easy to write and read (syntax)</a:t>
-            </a:r>
-          </a:p>
-          <a:p>
-            <a:r>
-              <a:rPr lang="en-US" dirty="0"/>
-              <a:t>Modules that extend the base language</a:t>
-            </a:r>
-          </a:p>
-          <a:p>
-            <a:r>
-              <a:rPr lang="en-US" dirty="0"/>
-              <a:t>General use of standard programming paradigms: loops, conditions, classes, functions</a:t>
-            </a:r>
-          </a:p>
-          <a:p>
-            <a:r>
-              <a:rPr lang="en-US" dirty="0"/>
-              <a:t>Development software/tools</a:t>
-            </a:r>
-          </a:p>
-          <a:p>
-            <a:r>
-              <a:rPr lang="en-US" dirty="0"/>
-              <a:t>Development Speed</a:t>
-            </a:r>
-          </a:p>
-          <a:p>
-            <a:r>
-              <a:rPr lang="en-US" dirty="0"/>
-              <a:t>Flexibility/</a:t>
-            </a:r>
+              <a:t>Python is not a data analytics language</a:t>
+            </a:r>
+          </a:p>
+          <a:p>
+            <a:pPr lvl="1"/>
+            <a:r>
+              <a:rPr lang="en-US" dirty="0"/>
+              <a:t>It is a general-purpose language with modules built for data analysis, data science, data display, and data querying.</a:t>
+            </a:r>
+          </a:p>
+          <a:p>
+            <a:r>
+              <a:rPr lang="en-US" dirty="0"/>
+              <a:t>Modules provide the extensions to the language.</a:t>
+            </a:r>
+          </a:p>
+          <a:p>
+            <a:pPr lvl="1"/>
+            <a:r>
+              <a:rPr lang="en-US" dirty="0"/>
+              <a:t>Pandas</a:t>
+            </a:r>
+          </a:p>
+          <a:p>
+            <a:pPr lvl="1"/>
             <a:r>
               <a:rPr lang="en-US" dirty="0" err="1"/>
-              <a:t>Resuability</a:t>
+              <a:t>Numpy</a:t>
             </a:r>
             <a:endParaRPr lang="en-US" dirty="0"/>
           </a:p>
           <a:p>
-            <a:endParaRPr lang="en-US" dirty="0"/>
-          </a:p>
-          <a:p>
-            <a:endParaRPr lang="en-US" dirty="0"/>
-          </a:p>
-        </p:txBody>
-      </p:sp>
-      <p:sp>
-        <p:nvSpPr>
-          <p:cNvPr id="5" name="Text Placeholder 4">
-            <a:extLst>
-              <a:ext uri="{FF2B5EF4-FFF2-40B4-BE49-F238E27FC236}">
-                <a16:creationId xmlns:a16="http://schemas.microsoft.com/office/drawing/2014/main" id="{73696BE7-BA58-BBD2-7000-F68A3DE2AF1C}"/>
-              </a:ext>
-            </a:extLst>
-          </p:cNvPr>
-          <p:cNvSpPr>
-            <a:spLocks noGrp="1"/>
-          </p:cNvSpPr>
-          <p:nvPr>
-            <p:ph type="body" sz="quarter" idx="3"/>
-          </p:nvPr>
-        </p:nvSpPr>
-        <p:spPr/>
-        <p:txBody>
-          <a:bodyPr/>
-          <a:lstStyle/>
-          <a:p>
-            <a:r>
-              <a:rPr lang="en-US" dirty="0"/>
-              <a:t>Cons</a:t>
-            </a:r>
-          </a:p>
-        </p:txBody>
-      </p:sp>
-      <p:sp>
-        <p:nvSpPr>
-          <p:cNvPr id="6" name="Content Placeholder 5">
-            <a:extLst>
-              <a:ext uri="{FF2B5EF4-FFF2-40B4-BE49-F238E27FC236}">
-                <a16:creationId xmlns:a16="http://schemas.microsoft.com/office/drawing/2014/main" id="{2F9CAFEE-9C6C-6646-40C1-3A2FD913478A}"/>
-              </a:ext>
-            </a:extLst>
-          </p:cNvPr>
-          <p:cNvSpPr>
-            <a:spLocks noGrp="1"/>
-          </p:cNvSpPr>
-          <p:nvPr>
-            <p:ph sz="quarter" idx="4"/>
-          </p:nvPr>
-        </p:nvSpPr>
-        <p:spPr/>
-        <p:txBody>
-          <a:bodyPr>
-            <a:normAutofit fontScale="92500"/>
-          </a:bodyPr>
-          <a:lstStyle/>
-          <a:p>
-            <a:r>
-              <a:rPr lang="en-US" dirty="0"/>
-              <a:t>Not designed for data analytics</a:t>
-            </a:r>
-          </a:p>
-          <a:p>
-            <a:r>
-              <a:rPr lang="en-US" dirty="0"/>
-              <a:t>Learning the language (coding/CS)</a:t>
-            </a:r>
-          </a:p>
-          <a:p>
-            <a:r>
-              <a:rPr lang="en-US" dirty="0"/>
-              <a:t>Learning the modules</a:t>
-            </a:r>
-          </a:p>
-          <a:p>
-            <a:r>
-              <a:rPr lang="en-US" dirty="0"/>
-              <a:t>Development software/tools</a:t>
-            </a:r>
-          </a:p>
-          <a:p>
-            <a:r>
-              <a:rPr lang="en-US" dirty="0"/>
-              <a:t>Run Speed</a:t>
-            </a:r>
-          </a:p>
-          <a:p>
-            <a:r>
-              <a:rPr lang="en-US" dirty="0"/>
-              <a:t>No Default Setup</a:t>
-            </a:r>
-          </a:p>
-          <a:p>
-            <a:r>
-              <a:rPr lang="en-US" dirty="0"/>
-              <a:t>Accounting for versions</a:t>
-            </a:r>
-          </a:p>
-          <a:p>
-            <a:endParaRPr lang="en-US" dirty="0"/>
+            <a:pPr lvl="1"/>
+            <a:r>
+              <a:rPr lang="en-US" dirty="0"/>
+              <a:t>Matplotlib</a:t>
+            </a:r>
+          </a:p>
+          <a:p>
+            <a:pPr lvl="1"/>
+            <a:r>
+              <a:rPr lang="en-US" dirty="0"/>
+              <a:t>Scikit Learn</a:t>
+            </a:r>
+          </a:p>
+          <a:p>
+            <a:pPr lvl="1"/>
+            <a:r>
+              <a:rPr lang="en-US" dirty="0"/>
+              <a:t>Tensor Flow</a:t>
+            </a:r>
+          </a:p>
+          <a:p>
+            <a:pPr lvl="1"/>
+            <a:r>
+              <a:rPr lang="en-US" dirty="0"/>
+              <a:t>Database modules</a:t>
+            </a:r>
+          </a:p>
+          <a:p>
+            <a:r>
+              <a:rPr lang="en-US" dirty="0"/>
+              <a:t>Combining modules with the features of the language: loops, conditionals, classes, functions, etc. create the real power and strength of language.</a:t>
+            </a:r>
+          </a:p>
+          <a:p>
+            <a:r>
+              <a:rPr lang="en-US" dirty="0"/>
+              <a:t>Can now be integrated in Excel and Power BI.</a:t>
+            </a:r>
+          </a:p>
+          <a:p>
+            <a:r>
+              <a:rPr lang="en-US" dirty="0"/>
+              <a:t>https://github.com/AdamKortis/cchmc_python_getting_started</a:t>
+            </a:r>
           </a:p>
         </p:txBody>
       </p:sp>
     </p:spTree>
     <p:extLst>
       <p:ext uri="{BB962C8B-B14F-4D97-AF65-F5344CB8AC3E}">
-        <p14:creationId xmlns:p14="http://schemas.microsoft.com/office/powerpoint/2010/main" val="2575487833"/>
+        <p14:creationId xmlns:p14="http://schemas.microsoft.com/office/powerpoint/2010/main" val="910298586"/>
       </p:ext>
     </p:extLst>
   </p:cSld>
@@ -5817,7 +7202,7 @@
           <p:cNvPr id="2" name="Title 1">
             <a:extLst>
               <a:ext uri="{FF2B5EF4-FFF2-40B4-BE49-F238E27FC236}">
-                <a16:creationId xmlns:a16="http://schemas.microsoft.com/office/drawing/2014/main" id="{AB52312E-617F-001A-E66C-81961692DB71}"/>
+                <a16:creationId xmlns:a16="http://schemas.microsoft.com/office/drawing/2014/main" id="{E9DB5B7C-22B6-D9DD-5D32-59170B91CCAD}"/>
               </a:ext>
             </a:extLst>
           </p:cNvPr>
@@ -5835,17 +7220,17 @@
           <a:p>
             <a:r>
               <a:rPr lang="en-US" dirty="0"/>
-              <a:t>What do you need to get started?</a:t>
-            </a:r>
-          </a:p>
-        </p:txBody>
-      </p:sp>
-      <p:sp>
-        <p:nvSpPr>
-          <p:cNvPr id="3" name="Content Placeholder 2">
+              <a:t>Understanding Pros and Cons of Python</a:t>
+            </a:r>
+          </a:p>
+        </p:txBody>
+      </p:sp>
+      <p:sp>
+        <p:nvSpPr>
+          <p:cNvPr id="3" name="Text Placeholder 2">
             <a:extLst>
               <a:ext uri="{FF2B5EF4-FFF2-40B4-BE49-F238E27FC236}">
-                <a16:creationId xmlns:a16="http://schemas.microsoft.com/office/drawing/2014/main" id="{31B4DBE4-0914-F3CD-EAC1-B8BDFD3528AE}"/>
+                <a16:creationId xmlns:a16="http://schemas.microsoft.com/office/drawing/2014/main" id="{DA30F27B-FB23-1C7B-9328-379CB5E2F0AA}"/>
               </a:ext>
             </a:extLst>
           </p:cNvPr>
@@ -5853,7 +7238,7 @@
             <a:spLocks noGrp="1"/>
           </p:cNvSpPr>
           <p:nvPr>
-            <p:ph idx="1"/>
+            <p:ph type="body" idx="1"/>
           </p:nvPr>
         </p:nvSpPr>
         <p:spPr/>
@@ -5861,71 +7246,191 @@
           <a:bodyPr/>
           <a:lstStyle/>
           <a:p>
-            <a:pPr marL="342900" indent="-342900">
-              <a:buFont typeface="+mj-lt"/>
-              <a:buAutoNum type="arabicPeriod"/>
-            </a:pPr>
-            <a:r>
-              <a:rPr lang="en-US" dirty="0"/>
-              <a:t>Download and install Python</a:t>
-            </a:r>
-          </a:p>
-          <a:p>
-            <a:pPr marL="342900" indent="-342900">
-              <a:buFont typeface="+mj-lt"/>
-              <a:buAutoNum type="arabicPeriod"/>
-            </a:pPr>
-            <a:r>
-              <a:rPr lang="en-US" dirty="0"/>
-              <a:t>Set up Python and PIP in your environment Path Variables</a:t>
-            </a:r>
-          </a:p>
-          <a:p>
-            <a:pPr marL="342900" indent="-342900">
-              <a:buFont typeface="+mj-lt"/>
-              <a:buAutoNum type="arabicPeriod"/>
-            </a:pPr>
-            <a:r>
-              <a:rPr lang="en-US" dirty="0"/>
-              <a:t>Choose an editor</a:t>
-            </a:r>
-          </a:p>
-          <a:p>
-            <a:pPr marL="342900" indent="-342900">
-              <a:buFont typeface="+mj-lt"/>
-              <a:buAutoNum type="arabicPeriod"/>
-            </a:pPr>
-            <a:r>
-              <a:rPr lang="en-US" dirty="0"/>
-              <a:t>Download, install, and setup the editor</a:t>
-            </a:r>
-          </a:p>
-          <a:p>
-            <a:pPr marL="342900" indent="-342900">
-              <a:buFont typeface="+mj-lt"/>
-              <a:buAutoNum type="arabicPeriod"/>
-            </a:pPr>
-            <a:r>
-              <a:rPr lang="en-US" dirty="0"/>
-              <a:t>Install relevant modules</a:t>
-            </a:r>
-          </a:p>
-          <a:p>
-            <a:pPr marL="342900" indent="-342900">
-              <a:buFont typeface="+mj-lt"/>
-              <a:buAutoNum type="arabicPeriod"/>
-            </a:pPr>
-            <a:r>
-              <a:rPr lang="en-US" dirty="0"/>
-              <a:t>Begin to code</a:t>
-            </a:r>
+            <a:r>
+              <a:rPr lang="en-US" dirty="0"/>
+              <a:t>Pros</a:t>
+            </a:r>
+          </a:p>
+        </p:txBody>
+      </p:sp>
+      <p:sp>
+        <p:nvSpPr>
+          <p:cNvPr id="4" name="Content Placeholder 3">
+            <a:extLst>
+              <a:ext uri="{FF2B5EF4-FFF2-40B4-BE49-F238E27FC236}">
+                <a16:creationId xmlns:a16="http://schemas.microsoft.com/office/drawing/2014/main" id="{884D22AB-4240-D845-367F-FAE101D4A88C}"/>
+              </a:ext>
+            </a:extLst>
+          </p:cNvPr>
+          <p:cNvSpPr>
+            <a:spLocks noGrp="1"/>
+          </p:cNvSpPr>
+          <p:nvPr>
+            <p:ph sz="half" idx="2"/>
+          </p:nvPr>
+        </p:nvSpPr>
+        <p:spPr/>
+        <p:txBody>
+          <a:bodyPr>
+            <a:normAutofit fontScale="92500"/>
+          </a:bodyPr>
+          <a:lstStyle/>
+          <a:p>
+            <a:r>
+              <a:rPr lang="en-US" dirty="0"/>
+              <a:t>Free Open Source</a:t>
+            </a:r>
+          </a:p>
+          <a:p>
+            <a:r>
+              <a:rPr lang="en-US" dirty="0"/>
+              <a:t>Easy to write and read (syntax)</a:t>
+            </a:r>
+          </a:p>
+          <a:p>
+            <a:r>
+              <a:rPr lang="en-US" dirty="0"/>
+              <a:t>Modules that extend the base language</a:t>
+            </a:r>
+          </a:p>
+          <a:p>
+            <a:r>
+              <a:rPr lang="en-US" dirty="0"/>
+              <a:t>General use of standard programming paradigms: loops, conditions, classes, functions</a:t>
+            </a:r>
+          </a:p>
+          <a:p>
+            <a:r>
+              <a:rPr lang="en-US" dirty="0"/>
+              <a:t>Development software/tools</a:t>
+            </a:r>
+          </a:p>
+          <a:p>
+            <a:r>
+              <a:rPr lang="en-US" dirty="0"/>
+              <a:t>Development Speed</a:t>
+            </a:r>
+          </a:p>
+          <a:p>
+            <a:r>
+              <a:rPr lang="en-US" dirty="0"/>
+              <a:t>Flexibility/</a:t>
+            </a:r>
+            <a:r>
+              <a:rPr lang="en-US" dirty="0" err="1"/>
+              <a:t>Resuability</a:t>
+            </a:r>
+            <a:endParaRPr lang="en-US" dirty="0"/>
+          </a:p>
+          <a:p>
+            <a:endParaRPr lang="en-US" dirty="0"/>
+          </a:p>
+          <a:p>
+            <a:endParaRPr lang="en-US" dirty="0"/>
+          </a:p>
+        </p:txBody>
+      </p:sp>
+      <p:sp>
+        <p:nvSpPr>
+          <p:cNvPr id="5" name="Text Placeholder 4">
+            <a:extLst>
+              <a:ext uri="{FF2B5EF4-FFF2-40B4-BE49-F238E27FC236}">
+                <a16:creationId xmlns:a16="http://schemas.microsoft.com/office/drawing/2014/main" id="{73696BE7-BA58-BBD2-7000-F68A3DE2AF1C}"/>
+              </a:ext>
+            </a:extLst>
+          </p:cNvPr>
+          <p:cNvSpPr>
+            <a:spLocks noGrp="1"/>
+          </p:cNvSpPr>
+          <p:nvPr>
+            <p:ph type="body" sz="quarter" idx="3"/>
+          </p:nvPr>
+        </p:nvSpPr>
+        <p:spPr/>
+        <p:txBody>
+          <a:bodyPr/>
+          <a:lstStyle/>
+          <a:p>
+            <a:r>
+              <a:rPr lang="en-US" dirty="0"/>
+              <a:t>Cons</a:t>
+            </a:r>
+          </a:p>
+        </p:txBody>
+      </p:sp>
+      <p:sp>
+        <p:nvSpPr>
+          <p:cNvPr id="6" name="Content Placeholder 5">
+            <a:extLst>
+              <a:ext uri="{FF2B5EF4-FFF2-40B4-BE49-F238E27FC236}">
+                <a16:creationId xmlns:a16="http://schemas.microsoft.com/office/drawing/2014/main" id="{2F9CAFEE-9C6C-6646-40C1-3A2FD913478A}"/>
+              </a:ext>
+            </a:extLst>
+          </p:cNvPr>
+          <p:cNvSpPr>
+            <a:spLocks noGrp="1"/>
+          </p:cNvSpPr>
+          <p:nvPr>
+            <p:ph sz="quarter" idx="4"/>
+          </p:nvPr>
+        </p:nvSpPr>
+        <p:spPr/>
+        <p:txBody>
+          <a:bodyPr>
+            <a:normAutofit fontScale="92500"/>
+          </a:bodyPr>
+          <a:lstStyle/>
+          <a:p>
+            <a:r>
+              <a:rPr lang="en-US" dirty="0"/>
+              <a:t>Not designed for data analytics</a:t>
+            </a:r>
+          </a:p>
+          <a:p>
+            <a:r>
+              <a:rPr lang="en-US" dirty="0"/>
+              <a:t>Learning the language (coding/CS)</a:t>
+            </a:r>
+          </a:p>
+          <a:p>
+            <a:r>
+              <a:rPr lang="en-US" dirty="0"/>
+              <a:t>Learning the modules</a:t>
+            </a:r>
+          </a:p>
+          <a:p>
+            <a:r>
+              <a:rPr lang="en-US" dirty="0"/>
+              <a:t>Development software/tools</a:t>
+            </a:r>
+          </a:p>
+          <a:p>
+            <a:r>
+              <a:rPr lang="en-US" dirty="0"/>
+              <a:t>Run Speed</a:t>
+            </a:r>
+          </a:p>
+          <a:p>
+            <a:r>
+              <a:rPr lang="en-US" dirty="0"/>
+              <a:t>No Default Setup</a:t>
+            </a:r>
+          </a:p>
+          <a:p>
+            <a:r>
+              <a:rPr lang="en-US" dirty="0"/>
+              <a:t>Accounting for versions</a:t>
+            </a:r>
+          </a:p>
+          <a:p>
+            <a:endParaRPr lang="en-US" dirty="0"/>
           </a:p>
         </p:txBody>
       </p:sp>
     </p:spTree>
     <p:extLst>
       <p:ext uri="{BB962C8B-B14F-4D97-AF65-F5344CB8AC3E}">
-        <p14:creationId xmlns:p14="http://schemas.microsoft.com/office/powerpoint/2010/main" val="3016401704"/>
+        <p14:creationId xmlns:p14="http://schemas.microsoft.com/office/powerpoint/2010/main" val="2575487833"/>
       </p:ext>
     </p:extLst>
   </p:cSld>
@@ -5957,6 +7462,146 @@
           <p:cNvPr id="2" name="Title 1">
             <a:extLst>
               <a:ext uri="{FF2B5EF4-FFF2-40B4-BE49-F238E27FC236}">
+                <a16:creationId xmlns:a16="http://schemas.microsoft.com/office/drawing/2014/main" id="{AB52312E-617F-001A-E66C-81961692DB71}"/>
+              </a:ext>
+            </a:extLst>
+          </p:cNvPr>
+          <p:cNvSpPr>
+            <a:spLocks noGrp="1"/>
+          </p:cNvSpPr>
+          <p:nvPr>
+            <p:ph type="title"/>
+          </p:nvPr>
+        </p:nvSpPr>
+        <p:spPr/>
+        <p:txBody>
+          <a:bodyPr/>
+          <a:lstStyle/>
+          <a:p>
+            <a:r>
+              <a:rPr lang="en-US" dirty="0"/>
+              <a:t>What do you need to get started?</a:t>
+            </a:r>
+          </a:p>
+        </p:txBody>
+      </p:sp>
+      <p:sp>
+        <p:nvSpPr>
+          <p:cNvPr id="3" name="Content Placeholder 2">
+            <a:extLst>
+              <a:ext uri="{FF2B5EF4-FFF2-40B4-BE49-F238E27FC236}">
+                <a16:creationId xmlns:a16="http://schemas.microsoft.com/office/drawing/2014/main" id="{31B4DBE4-0914-F3CD-EAC1-B8BDFD3528AE}"/>
+              </a:ext>
+            </a:extLst>
+          </p:cNvPr>
+          <p:cNvSpPr>
+            <a:spLocks noGrp="1"/>
+          </p:cNvSpPr>
+          <p:nvPr>
+            <p:ph idx="1"/>
+          </p:nvPr>
+        </p:nvSpPr>
+        <p:spPr/>
+        <p:txBody>
+          <a:bodyPr/>
+          <a:lstStyle/>
+          <a:p>
+            <a:pPr marL="342900" indent="-342900">
+              <a:buFont typeface="+mj-lt"/>
+              <a:buAutoNum type="arabicPeriod"/>
+            </a:pPr>
+            <a:r>
+              <a:rPr lang="en-US" dirty="0"/>
+              <a:t>Download and install Python</a:t>
+            </a:r>
+          </a:p>
+          <a:p>
+            <a:pPr marL="342900" indent="-342900">
+              <a:buFont typeface="+mj-lt"/>
+              <a:buAutoNum type="arabicPeriod"/>
+            </a:pPr>
+            <a:r>
+              <a:rPr lang="en-US" dirty="0"/>
+              <a:t>Set up Python and PIP in your environment Path Variables</a:t>
+            </a:r>
+          </a:p>
+          <a:p>
+            <a:pPr marL="342900" indent="-342900">
+              <a:buFont typeface="+mj-lt"/>
+              <a:buAutoNum type="arabicPeriod"/>
+            </a:pPr>
+            <a:r>
+              <a:rPr lang="en-US" dirty="0"/>
+              <a:t>Choose an editor</a:t>
+            </a:r>
+          </a:p>
+          <a:p>
+            <a:pPr marL="342900" indent="-342900">
+              <a:buFont typeface="+mj-lt"/>
+              <a:buAutoNum type="arabicPeriod"/>
+            </a:pPr>
+            <a:r>
+              <a:rPr lang="en-US" dirty="0"/>
+              <a:t>Download, install, and setup the editor</a:t>
+            </a:r>
+          </a:p>
+          <a:p>
+            <a:pPr marL="342900" indent="-342900">
+              <a:buFont typeface="+mj-lt"/>
+              <a:buAutoNum type="arabicPeriod"/>
+            </a:pPr>
+            <a:r>
+              <a:rPr lang="en-US" dirty="0"/>
+              <a:t>Install relevant modules</a:t>
+            </a:r>
+          </a:p>
+          <a:p>
+            <a:pPr marL="342900" indent="-342900">
+              <a:buFont typeface="+mj-lt"/>
+              <a:buAutoNum type="arabicPeriod"/>
+            </a:pPr>
+            <a:r>
+              <a:rPr lang="en-US" dirty="0"/>
+              <a:t>Begin to code</a:t>
+            </a:r>
+          </a:p>
+        </p:txBody>
+      </p:sp>
+    </p:spTree>
+    <p:extLst>
+      <p:ext uri="{BB962C8B-B14F-4D97-AF65-F5344CB8AC3E}">
+        <p14:creationId xmlns:p14="http://schemas.microsoft.com/office/powerpoint/2010/main" val="3016401704"/>
+      </p:ext>
+    </p:extLst>
+  </p:cSld>
+  <p:clrMapOvr>
+    <a:masterClrMapping/>
+  </p:clrMapOvr>
+</p:sld>
+</file>
+
+<file path=ppt/slides/slide7.xml><?xml version="1.0" encoding="utf-8"?>
+<p:sld xmlns:a="http://schemas.openxmlformats.org/drawingml/2006/main" xmlns:r="http://schemas.openxmlformats.org/officeDocument/2006/relationships" xmlns:p="http://schemas.openxmlformats.org/presentationml/2006/main">
+  <p:cSld>
+    <p:spTree>
+      <p:nvGrpSpPr>
+        <p:cNvPr id="1" name=""/>
+        <p:cNvGrpSpPr/>
+        <p:nvPr/>
+      </p:nvGrpSpPr>
+      <p:grpSpPr>
+        <a:xfrm>
+          <a:off x="0" y="0"/>
+          <a:ext cx="0" cy="0"/>
+          <a:chOff x="0" y="0"/>
+          <a:chExt cx="0" cy="0"/>
+        </a:xfrm>
+      </p:grpSpPr>
+      <p:sp>
+        <p:nvSpPr>
+          <p:cNvPr id="2" name="Title 1">
+            <a:extLst>
+              <a:ext uri="{FF2B5EF4-FFF2-40B4-BE49-F238E27FC236}">
                 <a16:creationId xmlns:a16="http://schemas.microsoft.com/office/drawing/2014/main" id="{F2BADDD1-03D0-2075-FFEE-4970ECA189AD}"/>
               </a:ext>
             </a:extLst>
@@ -6056,7 +7701,15 @@
             </a:r>
             <a:r>
               <a:rPr lang="en-US" dirty="0"/>
-              <a:t>\Local\Programs\Python\1&lt;version&gt;</a:t>
+              <a:t>\Local\Programs\</a:t>
+            </a:r>
+            <a:r>
+              <a:rPr lang="en-US"/>
+              <a:t>Python\&lt;</a:t>
+            </a:r>
+            <a:r>
+              <a:rPr lang="en-US" dirty="0"/>
+              <a:t>version&gt;</a:t>
             </a:r>
           </a:p>
           <a:p>
@@ -6120,7 +7773,7 @@
 </p:sld>
 </file>
 
-<file path=ppt/slides/slide7.xml><?xml version="1.0" encoding="utf-8"?>
+<file path=ppt/slides/slide8.xml><?xml version="1.0" encoding="utf-8"?>
 <p:sld xmlns:a="http://schemas.openxmlformats.org/drawingml/2006/main" xmlns:r="http://schemas.openxmlformats.org/officeDocument/2006/relationships" xmlns:p="http://schemas.openxmlformats.org/presentationml/2006/main">
   <p:cSld>
     <p:spTree>
@@ -6366,7 +8019,7 @@
 </p:sld>
 </file>
 
-<file path=ppt/slides/slide8.xml><?xml version="1.0" encoding="utf-8"?>
+<file path=ppt/slides/slide9.xml><?xml version="1.0" encoding="utf-8"?>
 <p:sld xmlns:a="http://schemas.openxmlformats.org/drawingml/2006/main" xmlns:r="http://schemas.openxmlformats.org/officeDocument/2006/relationships" xmlns:p="http://schemas.openxmlformats.org/presentationml/2006/main">
   <p:cSld>
     <p:spTree>
@@ -6445,228 +8098,6 @@
     <p:extLst>
       <p:ext uri="{BB962C8B-B14F-4D97-AF65-F5344CB8AC3E}">
         <p14:creationId xmlns:p14="http://schemas.microsoft.com/office/powerpoint/2010/main" val="2911452149"/>
-      </p:ext>
-    </p:extLst>
-  </p:cSld>
-  <p:clrMapOvr>
-    <a:masterClrMapping/>
-  </p:clrMapOvr>
-</p:sld>
-</file>
-
-<file path=ppt/slides/slide9.xml><?xml version="1.0" encoding="utf-8"?>
-<p:sld xmlns:a="http://schemas.openxmlformats.org/drawingml/2006/main" xmlns:r="http://schemas.openxmlformats.org/officeDocument/2006/relationships" xmlns:p="http://schemas.openxmlformats.org/presentationml/2006/main">
-  <p:cSld>
-    <p:spTree>
-      <p:nvGrpSpPr>
-        <p:cNvPr id="1" name=""/>
-        <p:cNvGrpSpPr/>
-        <p:nvPr/>
-      </p:nvGrpSpPr>
-      <p:grpSpPr>
-        <a:xfrm>
-          <a:off x="0" y="0"/>
-          <a:ext cx="0" cy="0"/>
-          <a:chOff x="0" y="0"/>
-          <a:chExt cx="0" cy="0"/>
-        </a:xfrm>
-      </p:grpSpPr>
-      <p:sp>
-        <p:nvSpPr>
-          <p:cNvPr id="2" name="Title 1">
-            <a:extLst>
-              <a:ext uri="{FF2B5EF4-FFF2-40B4-BE49-F238E27FC236}">
-                <a16:creationId xmlns:a16="http://schemas.microsoft.com/office/drawing/2014/main" id="{F3053089-2FE7-949B-3A32-64DE992CDD08}"/>
-              </a:ext>
-            </a:extLst>
-          </p:cNvPr>
-          <p:cNvSpPr>
-            <a:spLocks noGrp="1"/>
-          </p:cNvSpPr>
-          <p:nvPr>
-            <p:ph type="title"/>
-          </p:nvPr>
-        </p:nvSpPr>
-        <p:spPr/>
-        <p:txBody>
-          <a:bodyPr/>
-          <a:lstStyle/>
-          <a:p>
-            <a:r>
-              <a:rPr lang="en-US" dirty="0"/>
-              <a:t>Development Environments/Software</a:t>
-            </a:r>
-          </a:p>
-        </p:txBody>
-      </p:sp>
-      <p:sp>
-        <p:nvSpPr>
-          <p:cNvPr id="3" name="Text Placeholder 2">
-            <a:extLst>
-              <a:ext uri="{FF2B5EF4-FFF2-40B4-BE49-F238E27FC236}">
-                <a16:creationId xmlns:a16="http://schemas.microsoft.com/office/drawing/2014/main" id="{1FA718D2-1515-4F60-5337-F48BE5CA15DD}"/>
-              </a:ext>
-            </a:extLst>
-          </p:cNvPr>
-          <p:cNvSpPr>
-            <a:spLocks noGrp="1"/>
-          </p:cNvSpPr>
-          <p:nvPr>
-            <p:ph type="body" idx="1"/>
-          </p:nvPr>
-        </p:nvSpPr>
-        <p:spPr/>
-        <p:txBody>
-          <a:bodyPr/>
-          <a:lstStyle/>
-          <a:p>
-            <a:r>
-              <a:rPr lang="en-US" dirty="0" err="1"/>
-              <a:t>Jupyter</a:t>
-            </a:r>
-            <a:r>
-              <a:rPr lang="en-US" dirty="0"/>
-              <a:t> Notebook</a:t>
-            </a:r>
-          </a:p>
-        </p:txBody>
-      </p:sp>
-      <p:sp>
-        <p:nvSpPr>
-          <p:cNvPr id="4" name="Content Placeholder 3">
-            <a:extLst>
-              <a:ext uri="{FF2B5EF4-FFF2-40B4-BE49-F238E27FC236}">
-                <a16:creationId xmlns:a16="http://schemas.microsoft.com/office/drawing/2014/main" id="{4085C49C-C004-108F-7C7B-D5B1192D78E6}"/>
-              </a:ext>
-            </a:extLst>
-          </p:cNvPr>
-          <p:cNvSpPr>
-            <a:spLocks noGrp="1"/>
-          </p:cNvSpPr>
-          <p:nvPr>
-            <p:ph sz="half" idx="2"/>
-          </p:nvPr>
-        </p:nvSpPr>
-        <p:spPr/>
-        <p:txBody>
-          <a:bodyPr/>
-          <a:lstStyle/>
-          <a:p>
-            <a:r>
-              <a:rPr lang="en-US" dirty="0"/>
-              <a:t>Similar style to SAS, or R Studio</a:t>
-            </a:r>
-          </a:p>
-          <a:p>
-            <a:r>
-              <a:rPr lang="en-US" dirty="0"/>
-              <a:t>Everything will be generated in one window.</a:t>
-            </a:r>
-          </a:p>
-          <a:p>
-            <a:r>
-              <a:rPr lang="en-US" dirty="0"/>
-              <a:t>Run and execute individual lines</a:t>
-            </a:r>
-          </a:p>
-          <a:p>
-            <a:r>
-              <a:rPr lang="en-US" dirty="0"/>
-              <a:t>Be careful of virtual environments</a:t>
-            </a:r>
-          </a:p>
-          <a:p>
-            <a:r>
-              <a:rPr lang="en-US" dirty="0"/>
-              <a:t>Difficult to create and manage large code base/modules</a:t>
-            </a:r>
-          </a:p>
-        </p:txBody>
-      </p:sp>
-      <p:sp>
-        <p:nvSpPr>
-          <p:cNvPr id="5" name="Text Placeholder 4">
-            <a:extLst>
-              <a:ext uri="{FF2B5EF4-FFF2-40B4-BE49-F238E27FC236}">
-                <a16:creationId xmlns:a16="http://schemas.microsoft.com/office/drawing/2014/main" id="{3BAA9CEA-E969-942C-87D0-ED405D6D7B77}"/>
-              </a:ext>
-            </a:extLst>
-          </p:cNvPr>
-          <p:cNvSpPr>
-            <a:spLocks noGrp="1"/>
-          </p:cNvSpPr>
-          <p:nvPr>
-            <p:ph type="body" sz="quarter" idx="3"/>
-          </p:nvPr>
-        </p:nvSpPr>
-        <p:spPr/>
-        <p:txBody>
-          <a:bodyPr/>
-          <a:lstStyle/>
-          <a:p>
-            <a:r>
-              <a:rPr lang="en-US" dirty="0"/>
-              <a:t>Code Editors (VS Code, or others)</a:t>
-            </a:r>
-          </a:p>
-        </p:txBody>
-      </p:sp>
-      <p:sp>
-        <p:nvSpPr>
-          <p:cNvPr id="6" name="Content Placeholder 5">
-            <a:extLst>
-              <a:ext uri="{FF2B5EF4-FFF2-40B4-BE49-F238E27FC236}">
-                <a16:creationId xmlns:a16="http://schemas.microsoft.com/office/drawing/2014/main" id="{7F2D1287-D343-C6D7-45D4-EB38928111A1}"/>
-              </a:ext>
-            </a:extLst>
-          </p:cNvPr>
-          <p:cNvSpPr>
-            <a:spLocks noGrp="1"/>
-          </p:cNvSpPr>
-          <p:nvPr>
-            <p:ph sz="quarter" idx="4"/>
-          </p:nvPr>
-        </p:nvSpPr>
-        <p:spPr/>
-        <p:txBody>
-          <a:bodyPr/>
-          <a:lstStyle/>
-          <a:p>
-            <a:r>
-              <a:rPr lang="en-US" dirty="0"/>
-              <a:t>Highly customizable</a:t>
-            </a:r>
-          </a:p>
-          <a:p>
-            <a:r>
-              <a:rPr lang="en-US" dirty="0"/>
-              <a:t>Extra extensions may need installed</a:t>
-            </a:r>
-          </a:p>
-          <a:p>
-            <a:r>
-              <a:rPr lang="en-US" dirty="0"/>
-              <a:t>Learn the editor</a:t>
-            </a:r>
-          </a:p>
-          <a:p>
-            <a:r>
-              <a:rPr lang="en-US" dirty="0"/>
-              <a:t>More difficult to run single lines of code</a:t>
-            </a:r>
-          </a:p>
-          <a:p>
-            <a:r>
-              <a:rPr lang="en-US" dirty="0"/>
-              <a:t>Easier to maintain and edit large code bases or multiple files.</a:t>
-            </a:r>
-          </a:p>
-        </p:txBody>
-      </p:sp>
-    </p:spTree>
-    <p:extLst>
-      <p:ext uri="{BB962C8B-B14F-4D97-AF65-F5344CB8AC3E}">
-        <p14:creationId xmlns:p14="http://schemas.microsoft.com/office/powerpoint/2010/main" val="1383140307"/>
       </p:ext>
     </p:extLst>
   </p:cSld>
